--- a/模板.pptx
+++ b/模板.pptx
@@ -1,11 +1,11 @@
 
 <file path=ppt/presentation.xml><?xml version="1.0" encoding="utf-8"?>
-<p:presentation xmlns:a="http://schemas.openxmlformats.org/drawingml/2006/main" xmlns:r="http://schemas.openxmlformats.org/officeDocument/2006/relationships" xmlns:p="http://schemas.openxmlformats.org/presentationml/2006/main" showSpecialPlsOnTitleSld="0">
+<p:presentation xmlns:a="http://schemas.openxmlformats.org/drawingml/2006/main" xmlns:r="http://schemas.openxmlformats.org/officeDocument/2006/relationships" xmlns:p="http://schemas.openxmlformats.org/presentationml/2006/main" showSpecialPlsOnTitleSld="0" saveSubsetFonts="1">
   <p:sldMasterIdLst>
     <p:sldMasterId id="2147483648" r:id="rId1"/>
   </p:sldMasterIdLst>
   <p:notesMasterIdLst>
-    <p:notesMasterId r:id="rId21"/>
+    <p:notesMasterId r:id="rId25"/>
   </p:notesMasterIdLst>
   <p:sldIdLst>
     <p:sldId id="256" r:id="rId2"/>
@@ -24,14 +24,18 @@
     <p:sldId id="269" r:id="rId15"/>
     <p:sldId id="270" r:id="rId16"/>
     <p:sldId id="271" r:id="rId17"/>
-    <p:sldId id="272" r:id="rId18"/>
-    <p:sldId id="273" r:id="rId19"/>
-    <p:sldId id="274" r:id="rId20"/>
+    <p:sldId id="276" r:id="rId18"/>
+    <p:sldId id="275" r:id="rId19"/>
+    <p:sldId id="277" r:id="rId20"/>
+    <p:sldId id="278" r:id="rId21"/>
+    <p:sldId id="272" r:id="rId22"/>
+    <p:sldId id="273" r:id="rId23"/>
+    <p:sldId id="274" r:id="rId24"/>
   </p:sldIdLst>
   <p:sldSz cx="12192000" cy="6858000"/>
   <p:notesSz cx="6858000" cy="9144000"/>
   <p:custDataLst>
-    <p:tags r:id="rId22"/>
+    <p:tags r:id="rId26"/>
   </p:custDataLst>
   <p:kinsoku lang="zh-CN" invalStChars="!),.:;?]}、。—ˇ¨〃々～‖…’”〕〉》」』〗】∶！＂＇），．：；？］｀｜｝·" invalEndChars="([{‘“〔〈《「『〖【（［｛．·"/>
   <p:defaultTextStyle>
@@ -1077,6 +1081,18 @@
   <p:clrMapOvr>
     <a:overrideClrMapping bg1="lt1" tx1="dk1" bg2="lt2" tx2="dk2" accent1="accent1" accent2="accent2" accent3="accent3" accent4="accent4" accent5="accent5" accent6="accent6" hlink="hlink" folHlink="folHlink"/>
   </p:clrMapOvr>
+  <mc:AlternateContent xmlns:mc="http://schemas.openxmlformats.org/markup-compatibility/2006">
+    <mc:Choice xmlns:p159="http://schemas.microsoft.com/office/powerpoint/2015/09/main" Requires="p159">
+      <p:transition xmlns:p14="http://schemas.microsoft.com/office/powerpoint/2010/main" spd="slow" p14:dur="1250">
+        <p159:morph option="byObject"/>
+      </p:transition>
+    </mc:Choice>
+    <mc:Fallback>
+      <p:transition spd="slow">
+        <p:fade/>
+      </p:transition>
+    </mc:Fallback>
+  </mc:AlternateContent>
 </p:sldLayout>
 </file>
 
@@ -1312,6 +1328,18 @@
   <p:clrMapOvr>
     <a:overrideClrMapping bg1="lt1" tx1="dk1" bg2="lt2" tx2="dk2" accent1="accent1" accent2="accent2" accent3="accent3" accent4="accent4" accent5="accent5" accent6="accent6" hlink="hlink" folHlink="folHlink"/>
   </p:clrMapOvr>
+  <mc:AlternateContent xmlns:mc="http://schemas.openxmlformats.org/markup-compatibility/2006">
+    <mc:Choice xmlns:p159="http://schemas.microsoft.com/office/powerpoint/2015/09/main" Requires="p159">
+      <p:transition xmlns:p14="http://schemas.microsoft.com/office/powerpoint/2010/main" spd="slow" p14:dur="1250">
+        <p159:morph option="byObject"/>
+      </p:transition>
+    </mc:Choice>
+    <mc:Fallback>
+      <p:transition spd="slow">
+        <p:fade/>
+      </p:transition>
+    </mc:Fallback>
+  </mc:AlternateContent>
 </p:sldLayout>
 </file>
 
@@ -2322,6 +2350,18 @@
   <p:clrMapOvr>
     <a:overrideClrMapping bg1="dk1" tx1="lt1" bg2="dk2" tx2="lt2" accent1="accent1" accent2="accent2" accent3="accent3" accent4="accent4" accent5="accent5" accent6="accent6" hlink="hlink" folHlink="folHlink"/>
   </p:clrMapOvr>
+  <mc:AlternateContent xmlns:mc="http://schemas.openxmlformats.org/markup-compatibility/2006">
+    <mc:Choice xmlns:p159="http://schemas.microsoft.com/office/powerpoint/2015/09/main" Requires="p159">
+      <p:transition xmlns:p14="http://schemas.microsoft.com/office/powerpoint/2010/main" spd="slow" p14:dur="1250">
+        <p159:morph option="byObject"/>
+      </p:transition>
+    </mc:Choice>
+    <mc:Fallback>
+      <p:transition spd="slow">
+        <p:fade/>
+      </p:transition>
+    </mc:Fallback>
+  </mc:AlternateContent>
 </p:sldLayout>
 </file>
 
@@ -2880,6 +2920,18 @@
   <p:clrMapOvr>
     <a:overrideClrMapping bg1="lt1" tx1="dk1" bg2="lt2" tx2="dk2" accent1="accent1" accent2="accent2" accent3="accent3" accent4="accent4" accent5="accent5" accent6="accent6" hlink="hlink" folHlink="folHlink"/>
   </p:clrMapOvr>
+  <mc:AlternateContent xmlns:mc="http://schemas.openxmlformats.org/markup-compatibility/2006">
+    <mc:Choice xmlns:p159="http://schemas.microsoft.com/office/powerpoint/2015/09/main" Requires="p159">
+      <p:transition xmlns:p14="http://schemas.microsoft.com/office/powerpoint/2010/main" spd="slow" p14:dur="1250">
+        <p159:morph option="byObject"/>
+      </p:transition>
+    </mc:Choice>
+    <mc:Fallback>
+      <p:transition spd="slow">
+        <p:fade/>
+      </p:transition>
+    </mc:Fallback>
+  </mc:AlternateContent>
 </p:sldLayout>
 </file>
 
@@ -3078,6 +3130,18 @@
   <p:clrMapOvr>
     <a:overrideClrMapping bg1="lt1" tx1="dk1" bg2="lt2" tx2="dk2" accent1="accent1" accent2="accent2" accent3="accent3" accent4="accent4" accent5="accent5" accent6="accent6" hlink="hlink" folHlink="folHlink"/>
   </p:clrMapOvr>
+  <mc:AlternateContent xmlns:mc="http://schemas.openxmlformats.org/markup-compatibility/2006">
+    <mc:Choice xmlns:p159="http://schemas.microsoft.com/office/powerpoint/2015/09/main" Requires="p159">
+      <p:transition xmlns:p14="http://schemas.microsoft.com/office/powerpoint/2010/main" spd="slow" p14:dur="1250">
+        <p159:morph option="byObject"/>
+      </p:transition>
+    </mc:Choice>
+    <mc:Fallback>
+      <p:transition spd="slow">
+        <p:fade/>
+      </p:transition>
+    </mc:Fallback>
+  </mc:AlternateContent>
 </p:sldLayout>
 </file>
 
@@ -3178,6 +3242,18 @@
   <p:clrMapOvr>
     <a:masterClrMapping/>
   </p:clrMapOvr>
+  <mc:AlternateContent xmlns:mc="http://schemas.openxmlformats.org/markup-compatibility/2006">
+    <mc:Choice xmlns:p159="http://schemas.microsoft.com/office/powerpoint/2015/09/main" Requires="p159">
+      <p:transition xmlns:p14="http://schemas.microsoft.com/office/powerpoint/2010/main" spd="slow" p14:dur="1250">
+        <p159:morph option="byObject"/>
+      </p:transition>
+    </mc:Choice>
+    <mc:Fallback>
+      <p:transition spd="slow">
+        <p:fade/>
+      </p:transition>
+    </mc:Fallback>
+  </mc:AlternateContent>
 </p:sldLayout>
 </file>
 
@@ -3724,6 +3800,18 @@
   <p:clrMapOvr>
     <a:overrideClrMapping bg1="lt1" tx1="dk1" bg2="lt2" tx2="dk2" accent1="accent1" accent2="accent2" accent3="accent3" accent4="accent4" accent5="accent5" accent6="accent6" hlink="hlink" folHlink="folHlink"/>
   </p:clrMapOvr>
+  <mc:AlternateContent xmlns:mc="http://schemas.openxmlformats.org/markup-compatibility/2006">
+    <mc:Choice xmlns:p159="http://schemas.microsoft.com/office/powerpoint/2015/09/main" Requires="p159">
+      <p:transition xmlns:p14="http://schemas.microsoft.com/office/powerpoint/2010/main" spd="slow" p14:dur="1250">
+        <p159:morph option="byObject"/>
+      </p:transition>
+    </mc:Choice>
+    <mc:Fallback>
+      <p:transition spd="slow">
+        <p:fade/>
+      </p:transition>
+    </mc:Fallback>
+  </mc:AlternateContent>
 </p:sldLayout>
 </file>
 
@@ -3983,6 +4071,18 @@
     <p:sldLayoutId id="2147483655" r:id="rId6"/>
     <p:sldLayoutId id="2147483656" r:id="rId7"/>
   </p:sldLayoutIdLst>
+  <mc:AlternateContent xmlns:mc="http://schemas.openxmlformats.org/markup-compatibility/2006">
+    <mc:Choice xmlns:p159="http://schemas.microsoft.com/office/powerpoint/2015/09/main" Requires="p159">
+      <p:transition xmlns:p14="http://schemas.microsoft.com/office/powerpoint/2010/main" spd="slow" p14:dur="1250">
+        <p159:morph option="byObject"/>
+      </p:transition>
+    </mc:Choice>
+    <mc:Fallback>
+      <p:transition spd="slow">
+        <p:fade/>
+      </p:transition>
+    </mc:Fallback>
+  </mc:AlternateContent>
   <p:hf sldNum="0" hdr="0" ftr="0" dt="0"/>
   <p:txStyles>
     <p:titleStyle>
@@ -4431,6 +4531,18 @@
   <p:clrMapOvr>
     <a:masterClrMapping/>
   </p:clrMapOvr>
+  <mc:AlternateContent xmlns:mc="http://schemas.openxmlformats.org/markup-compatibility/2006">
+    <mc:Choice xmlns:p159="http://schemas.microsoft.com/office/powerpoint/2015/09/main" Requires="p159">
+      <p:transition xmlns:p14="http://schemas.microsoft.com/office/powerpoint/2010/main" spd="slow" p14:dur="1250">
+        <p159:morph option="byObject"/>
+      </p:transition>
+    </mc:Choice>
+    <mc:Fallback>
+      <p:transition spd="slow">
+        <p:fade/>
+      </p:transition>
+    </mc:Fallback>
+  </mc:AlternateContent>
 </p:sld>
 </file>
 
@@ -4726,6 +4838,18 @@
   <p:clrMapOvr>
     <a:masterClrMapping/>
   </p:clrMapOvr>
+  <mc:AlternateContent xmlns:mc="http://schemas.openxmlformats.org/markup-compatibility/2006">
+    <mc:Choice xmlns:p159="http://schemas.microsoft.com/office/powerpoint/2015/09/main" Requires="p159">
+      <p:transition xmlns:p14="http://schemas.microsoft.com/office/powerpoint/2010/main" spd="slow" p14:dur="1250">
+        <p159:morph option="byObject"/>
+      </p:transition>
+    </mc:Choice>
+    <mc:Fallback>
+      <p:transition spd="slow">
+        <p:fade/>
+      </p:transition>
+    </mc:Fallback>
+  </mc:AlternateContent>
 </p:sld>
 </file>
 
@@ -4850,6 +4974,18 @@
   <p:clrMapOvr>
     <a:masterClrMapping/>
   </p:clrMapOvr>
+  <mc:AlternateContent xmlns:mc="http://schemas.openxmlformats.org/markup-compatibility/2006">
+    <mc:Choice xmlns:p159="http://schemas.microsoft.com/office/powerpoint/2015/09/main" Requires="p159">
+      <p:transition xmlns:p14="http://schemas.microsoft.com/office/powerpoint/2010/main" spd="slow" p14:dur="1250">
+        <p159:morph option="byObject"/>
+      </p:transition>
+    </mc:Choice>
+    <mc:Fallback>
+      <p:transition spd="slow">
+        <p:fade/>
+      </p:transition>
+    </mc:Fallback>
+  </mc:AlternateContent>
 </p:sld>
 </file>
 
@@ -5177,6 +5313,18 @@
   <p:clrMapOvr>
     <a:masterClrMapping/>
   </p:clrMapOvr>
+  <mc:AlternateContent xmlns:mc="http://schemas.openxmlformats.org/markup-compatibility/2006">
+    <mc:Choice xmlns:p159="http://schemas.microsoft.com/office/powerpoint/2015/09/main" Requires="p159">
+      <p:transition xmlns:p14="http://schemas.microsoft.com/office/powerpoint/2010/main" spd="slow" p14:dur="1250">
+        <p159:morph option="byObject"/>
+      </p:transition>
+    </mc:Choice>
+    <mc:Fallback>
+      <p:transition spd="slow">
+        <p:fade/>
+      </p:transition>
+    </mc:Fallback>
+  </mc:AlternateContent>
 </p:sld>
 </file>
 
@@ -5279,6 +5427,18 @@
   <p:clrMapOvr>
     <a:masterClrMapping/>
   </p:clrMapOvr>
+  <mc:AlternateContent xmlns:mc="http://schemas.openxmlformats.org/markup-compatibility/2006">
+    <mc:Choice xmlns:p159="http://schemas.microsoft.com/office/powerpoint/2015/09/main" Requires="p159">
+      <p:transition xmlns:p14="http://schemas.microsoft.com/office/powerpoint/2010/main" spd="slow" p14:dur="1250">
+        <p159:morph option="byObject"/>
+      </p:transition>
+    </mc:Choice>
+    <mc:Fallback>
+      <p:transition spd="slow">
+        <p:fade/>
+      </p:transition>
+    </mc:Fallback>
+  </mc:AlternateContent>
 </p:sld>
 </file>
 
@@ -5521,6 +5681,18 @@
   <p:clrMapOvr>
     <a:masterClrMapping/>
   </p:clrMapOvr>
+  <mc:AlternateContent xmlns:mc="http://schemas.openxmlformats.org/markup-compatibility/2006">
+    <mc:Choice xmlns:p159="http://schemas.microsoft.com/office/powerpoint/2015/09/main" Requires="p159">
+      <p:transition xmlns:p14="http://schemas.microsoft.com/office/powerpoint/2010/main" spd="slow" p14:dur="1250">
+        <p159:morph option="byObject"/>
+      </p:transition>
+    </mc:Choice>
+    <mc:Fallback>
+      <p:transition spd="slow">
+        <p:fade/>
+      </p:transition>
+    </mc:Fallback>
+  </mc:AlternateContent>
 </p:sld>
 </file>
 
@@ -5629,6 +5801,18 @@
   <p:clrMapOvr>
     <a:masterClrMapping/>
   </p:clrMapOvr>
+  <mc:AlternateContent xmlns:mc="http://schemas.openxmlformats.org/markup-compatibility/2006">
+    <mc:Choice xmlns:p159="http://schemas.microsoft.com/office/powerpoint/2015/09/main" Requires="p159">
+      <p:transition xmlns:p14="http://schemas.microsoft.com/office/powerpoint/2010/main" spd="slow" p14:dur="1250">
+        <p159:morph option="byObject"/>
+      </p:transition>
+    </mc:Choice>
+    <mc:Fallback>
+      <p:transition spd="slow">
+        <p:fade/>
+      </p:transition>
+    </mc:Fallback>
+  </mc:AlternateContent>
 </p:sld>
 </file>
 
@@ -5696,7 +5880,7 @@
         <p:spPr>
           <a:xfrm>
             <a:off x="660399" y="1257300"/>
-            <a:ext cx="10858500" cy="5632311"/>
+            <a:ext cx="10858500" cy="2246769"/>
           </a:xfrm>
           <a:prstGeom prst="rect">
             <a:avLst/>
@@ -5710,79 +5894,11 @@
           <a:lstStyle/>
           <a:p>
             <a:r>
-              <a:rPr lang="en-US" altLang="zh-CN" sz="2000" dirty="0">
-                <a:latin typeface="华文楷体" panose="02010600040101010101" pitchFamily="2" charset="-122"/>
-                <a:ea typeface="华文楷体" panose="02010600040101010101" pitchFamily="2" charset="-122"/>
-              </a:rPr>
-              <a:t>       </a:t>
-            </a:r>
-            <a:r>
-              <a:rPr lang="zh-CN" altLang="zh-CN" sz="2000" dirty="0">
-                <a:latin typeface="华文楷体" panose="02010600040101010101" pitchFamily="2" charset="-122"/>
-                <a:ea typeface="华文楷体" panose="02010600040101010101" pitchFamily="2" charset="-122"/>
-              </a:rPr>
-              <a:t>“牛”字看起来简单，只有四笔，可很多人写出来要么歪斜、要么松散，其实只要掌握好笔顺、笔画长短和结构位置，就能写得工整又好看。</a:t>
-            </a:r>
-          </a:p>
-          <a:p>
-            <a:r>
-              <a:rPr lang="zh-CN" altLang="zh-CN" sz="2000" dirty="0">
-                <a:latin typeface="华文楷体" panose="02010600040101010101" pitchFamily="2" charset="-122"/>
-                <a:ea typeface="华文楷体" panose="02010600040101010101" pitchFamily="2" charset="-122"/>
-              </a:rPr>
-              <a:t>首先要牢记正确的书写顺序：先写撇，再写第一横，接着写第二横，最后写中间的竖。笔顺正确是写好字的基础，顺序错了，笔画之间的衔接就会不自然，字也容易显得别扭。</a:t>
-            </a:r>
-          </a:p>
-          <a:p>
-            <a:r>
-              <a:rPr lang="zh-CN" altLang="zh-CN" sz="2000" dirty="0">
-                <a:latin typeface="华文楷体" panose="02010600040101010101" pitchFamily="2" charset="-122"/>
-                <a:ea typeface="华文楷体" panose="02010600040101010101" pitchFamily="2" charset="-122"/>
-              </a:rPr>
-              <a:t>写第一笔撇的时候，要注意短小有力。从田字格上半部分起笔，轻轻向右下方撇出，不要太长也不要太弯，更不能写成直直的一竖，这个撇就像小牛的角，恰到好处才精神。</a:t>
-            </a:r>
-          </a:p>
-          <a:p>
-            <a:r>
-              <a:rPr lang="zh-CN" altLang="zh-CN" sz="2000" dirty="0">
-                <a:latin typeface="华文楷体" panose="02010600040101010101" pitchFamily="2" charset="-122"/>
-                <a:ea typeface="华文楷体" panose="02010600040101010101" pitchFamily="2" charset="-122"/>
-              </a:rPr>
-              <a:t>接下来是第一横，这一横要写得短而平，位置在撇的中下部，和撇连接紧密。这一横不能写得太长，也不能向上倾斜得太厉害，保持平稳，才能给下面的笔画打好基础</a:t>
-            </a:r>
-          </a:p>
-          <a:p>
-            <a:r>
-              <a:rPr lang="zh-CN" altLang="zh-CN" sz="2000" dirty="0">
-                <a:latin typeface="华文楷体" panose="02010600040101010101" pitchFamily="2" charset="-122"/>
-                <a:ea typeface="华文楷体" panose="02010600040101010101" pitchFamily="2" charset="-122"/>
-              </a:rPr>
-              <a:t>然后是第二横，这一横是整个字里最宽的一笔，要比上面的短横明显长一些，起到舒展字形的作用。两横之间的距离要适中，不要挨得太近显得拥挤，也不要离得太远显得松散，保持均匀的间距，整体才会美观。</a:t>
-            </a:r>
-          </a:p>
-          <a:p>
-            <a:r>
-              <a:rPr lang="zh-CN" altLang="zh-CN" sz="2000" dirty="0">
-                <a:latin typeface="华文楷体" panose="02010600040101010101" pitchFamily="2" charset="-122"/>
-                <a:ea typeface="华文楷体" panose="02010600040101010101" pitchFamily="2" charset="-122"/>
-              </a:rPr>
-              <a:t>最后一笔竖画是关键，它是整个字的支撑，一定要写在正中间，垂直向下，笔直地穿过两横。竖画要挺拔有力，不能弯曲，也不能偏向左边或右边，只要竖写正了，“牛”字就会站得稳、看起来端正大方。</a:t>
-            </a:r>
-          </a:p>
-          <a:p>
-            <a:r>
-              <a:rPr lang="en-US" altLang="zh-CN" sz="2000" dirty="0">
-                <a:latin typeface="华文楷体" panose="02010600040101010101" pitchFamily="2" charset="-122"/>
-                <a:ea typeface="华文楷体" panose="02010600040101010101" pitchFamily="2" charset="-122"/>
-              </a:rPr>
-              <a:t>        </a:t>
-            </a:r>
-            <a:r>
-              <a:rPr lang="zh-CN" altLang="zh-CN" sz="2000" dirty="0">
-                <a:latin typeface="华文楷体" panose="02010600040101010101" pitchFamily="2" charset="-122"/>
-                <a:ea typeface="华文楷体" panose="02010600040101010101" pitchFamily="2" charset="-122"/>
-              </a:rPr>
-              <a:t>在书写时，还要注意整体的字形比例，不要写得太宽太扁，也不要写得太窄太长，尽量让整个字匀称协调。可以在田字格里多练习，找准每一笔的位置，反复对照修改，慢慢就能找到手感，把“牛”字写得规范、整齐又好看。</a:t>
+              <a:rPr lang="zh-CN" altLang="en-US" sz="2000" dirty="0">
+                <a:latin typeface="华文楷体" panose="02010600040101010101" pitchFamily="2" charset="-122"/>
+                <a:ea typeface="华文楷体" panose="02010600040101010101" pitchFamily="2" charset="-122"/>
+              </a:rPr>
+              <a:t>写好“牛”字，需把握笔顺、结构与笔画细节。笔顺为：短撇→短横→长横→中竖。</a:t>
             </a:r>
           </a:p>
           <a:p>
@@ -5790,6 +5906,44 @@
               <a:latin typeface="华文楷体" panose="02010600040101010101" pitchFamily="2" charset="-122"/>
               <a:ea typeface="华文楷体" panose="02010600040101010101" pitchFamily="2" charset="-122"/>
             </a:endParaRPr>
+          </a:p>
+          <a:p>
+            <a:r>
+              <a:rPr lang="zh-CN" altLang="en-US" sz="2000" dirty="0">
+                <a:latin typeface="华文楷体" panose="02010600040101010101" pitchFamily="2" charset="-122"/>
+                <a:ea typeface="华文楷体" panose="02010600040101010101" pitchFamily="2" charset="-122"/>
+              </a:rPr>
+              <a:t>短撇宜平（约</a:t>
+            </a:r>
+            <a:r>
+              <a:rPr lang="en-US" altLang="zh-CN" sz="2000" dirty="0">
+                <a:latin typeface="华文楷体" panose="02010600040101010101" pitchFamily="2" charset="-122"/>
+                <a:ea typeface="华文楷体" panose="02010600040101010101" pitchFamily="2" charset="-122"/>
+              </a:rPr>
+              <a:t>30°</a:t>
+            </a:r>
+            <a:r>
+              <a:rPr lang="zh-CN" altLang="en-US" sz="2000" dirty="0">
+                <a:latin typeface="华文楷体" panose="02010600040101010101" pitchFamily="2" charset="-122"/>
+                <a:ea typeface="华文楷体" panose="02010600040101010101" pitchFamily="2" charset="-122"/>
+              </a:rPr>
+              <a:t>），如牛角短促有力。两横上短下长，间距紧凑，长横略扛肩以托稳字形。中竖为关键，须垂直贯穿两横正中央，并写作悬针竖（末端出尖），使字挺拔。</a:t>
+            </a:r>
+          </a:p>
+          <a:p>
+            <a:endParaRPr lang="zh-CN" altLang="en-US" sz="2000" dirty="0">
+              <a:latin typeface="华文楷体" panose="02010600040101010101" pitchFamily="2" charset="-122"/>
+              <a:ea typeface="华文楷体" panose="02010600040101010101" pitchFamily="2" charset="-122"/>
+            </a:endParaRPr>
+          </a:p>
+          <a:p>
+            <a:r>
+              <a:rPr lang="zh-CN" altLang="en-US" sz="2000" dirty="0">
+                <a:latin typeface="华文楷体" panose="02010600040101010101" pitchFamily="2" charset="-122"/>
+                <a:ea typeface="华文楷体" panose="02010600040101010101" pitchFamily="2" charset="-122"/>
+              </a:rPr>
+              <a:t>整体遵循上紧下松原则，竖画写正，字形即稳。避免撇过斜、横距过大或竖画弯曲，可保端正精神。</a:t>
+            </a:r>
           </a:p>
         </p:txBody>
       </p:sp>
@@ -5803,6 +5957,18 @@
   <p:clrMapOvr>
     <a:masterClrMapping/>
   </p:clrMapOvr>
+  <mc:AlternateContent xmlns:mc="http://schemas.openxmlformats.org/markup-compatibility/2006">
+    <mc:Choice xmlns:p159="http://schemas.microsoft.com/office/powerpoint/2015/09/main" Requires="p159">
+      <p:transition xmlns:p14="http://schemas.microsoft.com/office/powerpoint/2010/main" spd="slow" p14:dur="1250">
+        <p159:morph option="byObject"/>
+      </p:transition>
+    </mc:Choice>
+    <mc:Fallback>
+      <p:transition spd="slow">
+        <p:fade/>
+      </p:transition>
+    </mc:Fallback>
+  </mc:AlternateContent>
 </p:sld>
 </file>
 
@@ -5828,7 +5994,7 @@
           <p:cNvPr id="2" name="标题 1">
             <a:extLst>
               <a:ext uri="{FF2B5EF4-FFF2-40B4-BE49-F238E27FC236}">
-                <a16:creationId xmlns:a16="http://schemas.microsoft.com/office/drawing/2014/main" id="{7062D397-7499-940F-D87B-DFABD9001F78}"/>
+                <a16:creationId xmlns:a16="http://schemas.microsoft.com/office/drawing/2014/main" id="{925C8855-74D9-4E85-71F8-F0BD025FAB9D}"/>
               </a:ext>
             </a:extLst>
           </p:cNvPr>
@@ -5839,20 +6005,32 @@
             <p:ph type="title"/>
           </p:nvPr>
         </p:nvSpPr>
-        <p:spPr/>
+        <p:spPr>
+          <a:xfrm>
+            <a:off x="4401519" y="767167"/>
+            <a:ext cx="7117381" cy="1818106"/>
+          </a:xfrm>
+        </p:spPr>
         <p:txBody>
           <a:bodyPr>
-            <a:normAutofit/>
+            <a:normAutofit fontScale="90000"/>
           </a:bodyPr>
           <a:lstStyle/>
           <a:p>
             <a:r>
-              <a:rPr lang="zh-CN" altLang="en-US" sz="8000" dirty="0">
-                <a:latin typeface="楷体" panose="02010609060101010101" pitchFamily="49" charset="-122"/>
-                <a:ea typeface="楷体" panose="02010609060101010101" pitchFamily="49" charset="-122"/>
-              </a:rPr>
-              <a:t>九、结尾</a:t>
-            </a:r>
+              <a:rPr lang="zh-CN" altLang="en-US" sz="6000" dirty="0">
+                <a:latin typeface="华文楷体" panose="02010600040101010101" pitchFamily="2" charset="-122"/>
+                <a:ea typeface="华文楷体" panose="02010600040101010101" pitchFamily="2" charset="-122"/>
+              </a:rPr>
+              <a:t>九、牛姓名人</a:t>
+            </a:r>
+            <a:br>
+              <a:rPr lang="en-US" altLang="zh-CN" sz="6000" dirty="0">
+                <a:latin typeface="华文楷体" panose="02010600040101010101" pitchFamily="2" charset="-122"/>
+                <a:ea typeface="华文楷体" panose="02010600040101010101" pitchFamily="2" charset="-122"/>
+              </a:rPr>
+            </a:br>
+            <a:endParaRPr lang="zh-CN" altLang="en-US" sz="6000" dirty="0"/>
           </a:p>
         </p:txBody>
       </p:sp>
@@ -5861,7 +6039,7 @@
           <p:cNvPr id="3" name="文本占位符 2">
             <a:extLst>
               <a:ext uri="{FF2B5EF4-FFF2-40B4-BE49-F238E27FC236}">
-                <a16:creationId xmlns:a16="http://schemas.microsoft.com/office/drawing/2014/main" id="{F5F317FC-781B-FD1A-DDDD-5D0961F055BA}"/>
+                <a16:creationId xmlns:a16="http://schemas.microsoft.com/office/drawing/2014/main" id="{E498F28C-51E9-D4A8-F51A-39172FC7849D}"/>
               </a:ext>
             </a:extLst>
           </p:cNvPr>
@@ -5877,20 +6055,32 @@
           <a:bodyPr/>
           <a:lstStyle/>
           <a:p>
-            <a:endParaRPr lang="zh-CN" altLang="en-US"/>
+            <a:endParaRPr lang="zh-CN" altLang="en-US" dirty="0"/>
           </a:p>
         </p:txBody>
       </p:sp>
     </p:spTree>
     <p:extLst>
       <p:ext uri="{BB962C8B-B14F-4D97-AF65-F5344CB8AC3E}">
-        <p14:creationId xmlns:p14="http://schemas.microsoft.com/office/powerpoint/2010/main" val="1980493189"/>
+        <p14:creationId xmlns:p14="http://schemas.microsoft.com/office/powerpoint/2010/main" val="2030815650"/>
       </p:ext>
     </p:extLst>
   </p:cSld>
   <p:clrMapOvr>
     <a:masterClrMapping/>
   </p:clrMapOvr>
+  <mc:AlternateContent xmlns:mc="http://schemas.openxmlformats.org/markup-compatibility/2006">
+    <mc:Choice xmlns:p159="http://schemas.microsoft.com/office/powerpoint/2015/09/main" Requires="p159">
+      <p:transition xmlns:p14="http://schemas.microsoft.com/office/powerpoint/2010/main" spd="slow" p14:dur="1250">
+        <p159:morph option="byObject"/>
+      </p:transition>
+    </mc:Choice>
+    <mc:Fallback>
+      <p:transition spd="slow">
+        <p:fade/>
+      </p:transition>
+    </mc:Fallback>
+  </mc:AlternateContent>
 </p:sld>
 </file>
 
@@ -5916,7 +6106,7 @@
           <p:cNvPr id="2" name="标题 1">
             <a:extLst>
               <a:ext uri="{FF2B5EF4-FFF2-40B4-BE49-F238E27FC236}">
-                <a16:creationId xmlns:a16="http://schemas.microsoft.com/office/drawing/2014/main" id="{306992D3-FAB9-480C-3A55-608422EC2928}"/>
+                <a16:creationId xmlns:a16="http://schemas.microsoft.com/office/drawing/2014/main" id="{119D7B23-C0EF-4B04-E7FC-54AEFA4D9489}"/>
               </a:ext>
             </a:extLst>
           </p:cNvPr>
@@ -5929,18 +6119,17 @@
         </p:nvSpPr>
         <p:spPr/>
         <p:txBody>
-          <a:bodyPr>
-            <a:normAutofit/>
-          </a:bodyPr>
+          <a:bodyPr/>
           <a:lstStyle/>
           <a:p>
             <a:r>
-              <a:rPr lang="zh-CN" altLang="en-US" sz="4800" dirty="0">
-                <a:latin typeface="华文楷体" panose="02010600040101010101" pitchFamily="2" charset="-122"/>
-                <a:ea typeface="华文楷体" panose="02010600040101010101" pitchFamily="2" charset="-122"/>
-              </a:rPr>
-              <a:t>结尾</a:t>
-            </a:r>
+              <a:rPr lang="zh-CN" altLang="en-US" dirty="0">
+                <a:latin typeface="华文楷体" panose="02010600040101010101" pitchFamily="2" charset="-122"/>
+                <a:ea typeface="华文楷体" panose="02010600040101010101" pitchFamily="2" charset="-122"/>
+              </a:rPr>
+              <a:t>九、牛姓名人</a:t>
+            </a:r>
+            <a:endParaRPr lang="zh-CN" altLang="en-US" dirty="0"/>
           </a:p>
         </p:txBody>
       </p:sp>
@@ -5949,7 +6138,7 @@
           <p:cNvPr id="3" name="文本框 2">
             <a:extLst>
               <a:ext uri="{FF2B5EF4-FFF2-40B4-BE49-F238E27FC236}">
-                <a16:creationId xmlns:a16="http://schemas.microsoft.com/office/drawing/2014/main" id="{01FA6327-2ED9-129D-9265-C58E55E387DC}"/>
+                <a16:creationId xmlns:a16="http://schemas.microsoft.com/office/drawing/2014/main" id="{5B2CDDCD-2638-247A-5BA2-B1FD588F4BDA}"/>
               </a:ext>
             </a:extLst>
           </p:cNvPr>
@@ -5958,8 +6147,8 @@
         </p:nvSpPr>
         <p:spPr>
           <a:xfrm>
-            <a:off x="1143000" y="1819274"/>
-            <a:ext cx="9277350" cy="2554545"/>
+            <a:off x="0" y="1487837"/>
+            <a:ext cx="12192000" cy="5262979"/>
           </a:xfrm>
           <a:prstGeom prst="rect">
             <a:avLst/>
@@ -5973,11 +6162,370 @@
           <a:lstStyle/>
           <a:p>
             <a:r>
-              <a:rPr lang="zh-CN" altLang="zh-CN" sz="4000" dirty="0">
-                <a:latin typeface="华文楷体" panose="02010600040101010101" pitchFamily="2" charset="-122"/>
-                <a:ea typeface="华文楷体" panose="02010600040101010101" pitchFamily="2" charset="-122"/>
-              </a:rPr>
-              <a:t>中国文明博大精深，从甲骨文到现在我们用的楷书，背后都是智慧和文化，我们也要努力学好汉字，把中华文化发扬光大！</a:t>
+              <a:rPr lang="zh-CN" altLang="en-US" sz="1600" dirty="0">
+                <a:latin typeface="华文楷体" panose="02010600040101010101" pitchFamily="2" charset="-122"/>
+                <a:ea typeface="华文楷体" panose="02010600040101010101" pitchFamily="2" charset="-122"/>
+              </a:rPr>
+              <a:t>🧬 牛满江：探索生命密码</a:t>
+            </a:r>
+          </a:p>
+          <a:p>
+            <a:r>
+              <a:rPr lang="zh-CN" altLang="en-US" sz="1600" dirty="0">
+                <a:latin typeface="华文楷体" panose="02010600040101010101" pitchFamily="2" charset="-122"/>
+                <a:ea typeface="华文楷体" panose="02010600040101010101" pitchFamily="2" charset="-122"/>
+              </a:rPr>
+              <a:t>他是国际著名的发育生物学家，美籍华人。他最厉害的是研究 </a:t>
+            </a:r>
+            <a:r>
+              <a:rPr lang="en-US" altLang="zh-CN" sz="1600" dirty="0">
+                <a:latin typeface="华文楷体" panose="02010600040101010101" pitchFamily="2" charset="-122"/>
+                <a:ea typeface="华文楷体" panose="02010600040101010101" pitchFamily="2" charset="-122"/>
+              </a:rPr>
+              <a:t>mRNA</a:t>
+            </a:r>
+            <a:r>
+              <a:rPr lang="zh-CN" altLang="en-US" sz="1600" dirty="0">
+                <a:latin typeface="华文楷体" panose="02010600040101010101" pitchFamily="2" charset="-122"/>
+                <a:ea typeface="华文楷体" panose="02010600040101010101" pitchFamily="2" charset="-122"/>
+              </a:rPr>
+              <a:t>（信使核糖核酸），早在几十年前就发现了它在遗传发育中的关键作用，还和童第周教授合作过实验，是生物学界的泰斗级人物。</a:t>
+            </a:r>
+          </a:p>
+          <a:p>
+            <a:endParaRPr lang="zh-CN" altLang="en-US" sz="1600" dirty="0">
+              <a:latin typeface="华文楷体" panose="02010600040101010101" pitchFamily="2" charset="-122"/>
+              <a:ea typeface="华文楷体" panose="02010600040101010101" pitchFamily="2" charset="-122"/>
+            </a:endParaRPr>
+          </a:p>
+          <a:p>
+            <a:r>
+              <a:rPr lang="zh-CN" altLang="en-US" sz="1600" dirty="0">
+                <a:latin typeface="华文楷体" panose="02010600040101010101" pitchFamily="2" charset="-122"/>
+                <a:ea typeface="华文楷体" panose="02010600040101010101" pitchFamily="2" charset="-122"/>
+              </a:rPr>
+              <a:t>📷 牛憨笨：给光拍照的院士</a:t>
+            </a:r>
+          </a:p>
+          <a:p>
+            <a:r>
+              <a:rPr lang="zh-CN" altLang="en-US" sz="1600" dirty="0">
+                <a:latin typeface="华文楷体" panose="02010600040101010101" pitchFamily="2" charset="-122"/>
+                <a:ea typeface="华文楷体" panose="02010600040101010101" pitchFamily="2" charset="-122"/>
+              </a:rPr>
+              <a:t>他是中国工程院院士，光电子学专家。他专门研究“超快现象”，比如研制了高速变像管相机，能拍下极快的光变化。这套技术对我国地下核试验和激光核聚变研究起到了关键作用。</a:t>
+            </a:r>
+          </a:p>
+          <a:p>
+            <a:endParaRPr lang="zh-CN" altLang="en-US" sz="1600" dirty="0">
+              <a:latin typeface="华文楷体" panose="02010600040101010101" pitchFamily="2" charset="-122"/>
+              <a:ea typeface="华文楷体" panose="02010600040101010101" pitchFamily="2" charset="-122"/>
+            </a:endParaRPr>
+          </a:p>
+          <a:p>
+            <a:r>
+              <a:rPr lang="zh-CN" altLang="en-US" sz="1600" dirty="0">
+                <a:latin typeface="华文楷体" panose="02010600040101010101" pitchFamily="2" charset="-122"/>
+                <a:ea typeface="华文楷体" panose="02010600040101010101" pitchFamily="2" charset="-122"/>
+              </a:rPr>
+              <a:t>🚀 牛济泰：焊接航天材料</a:t>
+            </a:r>
+          </a:p>
+          <a:p>
+            <a:r>
+              <a:rPr lang="zh-CN" altLang="en-US" sz="1600" dirty="0">
+                <a:latin typeface="华文楷体" panose="02010600040101010101" pitchFamily="2" charset="-122"/>
+                <a:ea typeface="华文楷体" panose="02010600040101010101" pitchFamily="2" charset="-122"/>
+              </a:rPr>
+              <a:t>他是俄罗斯自然科学院院士，哈工大教授。他专门解决航空航天新材料的焊接难题，比如怎么把火箭、飞机上的特殊材料牢牢连在一起，是航天焊接领域的权威专家</a:t>
+            </a:r>
+            <a:endParaRPr lang="en-US" altLang="zh-CN" sz="1600" dirty="0">
+              <a:latin typeface="华文楷体" panose="02010600040101010101" pitchFamily="2" charset="-122"/>
+              <a:ea typeface="华文楷体" panose="02010600040101010101" pitchFamily="2" charset="-122"/>
+            </a:endParaRPr>
+          </a:p>
+          <a:p>
+            <a:endParaRPr lang="en-US" altLang="zh-CN" sz="1600" dirty="0">
+              <a:latin typeface="华文楷体" panose="02010600040101010101" pitchFamily="2" charset="-122"/>
+              <a:ea typeface="华文楷体" panose="02010600040101010101" pitchFamily="2" charset="-122"/>
+            </a:endParaRPr>
+          </a:p>
+          <a:p>
+            <a:r>
+              <a:rPr lang="zh-CN" altLang="en-US" sz="1600" dirty="0">
+                <a:latin typeface="华文楷体" panose="02010600040101010101" pitchFamily="2" charset="-122"/>
+                <a:ea typeface="华文楷体" panose="02010600040101010101" pitchFamily="2" charset="-122"/>
+              </a:rPr>
+              <a:t>牛犇（</a:t>
+            </a:r>
+            <a:r>
+              <a:rPr lang="en-US" altLang="zh-CN" sz="1600" dirty="0">
+                <a:latin typeface="华文楷体" panose="02010600040101010101" pitchFamily="2" charset="-122"/>
+                <a:ea typeface="华文楷体" panose="02010600040101010101" pitchFamily="2" charset="-122"/>
+              </a:rPr>
+              <a:t>1935- </a:t>
+            </a:r>
+            <a:r>
+              <a:rPr lang="zh-CN" altLang="en-US" sz="1600" dirty="0">
+                <a:latin typeface="华文楷体" panose="02010600040101010101" pitchFamily="2" charset="-122"/>
+                <a:ea typeface="华文楷体" panose="02010600040101010101" pitchFamily="2" charset="-122"/>
+              </a:rPr>
+              <a:t>），原名张学景，天津人，上海电影制片厂一级演员，被誉为“影坛常青树”。</a:t>
+            </a:r>
+          </a:p>
+          <a:p>
+            <a:endParaRPr lang="zh-CN" altLang="en-US" sz="1600" dirty="0">
+              <a:latin typeface="华文楷体" panose="02010600040101010101" pitchFamily="2" charset="-122"/>
+              <a:ea typeface="华文楷体" panose="02010600040101010101" pitchFamily="2" charset="-122"/>
+            </a:endParaRPr>
+          </a:p>
+          <a:p>
+            <a:r>
+              <a:rPr lang="en-US" altLang="zh-CN" sz="1600" dirty="0">
+                <a:latin typeface="华文楷体" panose="02010600040101010101" pitchFamily="2" charset="-122"/>
+                <a:ea typeface="华文楷体" panose="02010600040101010101" pitchFamily="2" charset="-122"/>
+              </a:rPr>
+              <a:t>1946</a:t>
+            </a:r>
+            <a:r>
+              <a:rPr lang="zh-CN" altLang="en-US" sz="1600" dirty="0">
+                <a:latin typeface="华文楷体" panose="02010600040101010101" pitchFamily="2" charset="-122"/>
+                <a:ea typeface="华文楷体" panose="02010600040101010101" pitchFamily="2" charset="-122"/>
+              </a:rPr>
+              <a:t>年凭</a:t>
+            </a:r>
+            <a:r>
+              <a:rPr lang="en-US" altLang="zh-CN" sz="1600" dirty="0">
+                <a:latin typeface="华文楷体" panose="02010600040101010101" pitchFamily="2" charset="-122"/>
+                <a:ea typeface="华文楷体" panose="02010600040101010101" pitchFamily="2" charset="-122"/>
+              </a:rPr>
+              <a:t>《</a:t>
+            </a:r>
+            <a:r>
+              <a:rPr lang="zh-CN" altLang="en-US" sz="1600" dirty="0">
+                <a:latin typeface="华文楷体" panose="02010600040101010101" pitchFamily="2" charset="-122"/>
+                <a:ea typeface="华文楷体" panose="02010600040101010101" pitchFamily="2" charset="-122"/>
+              </a:rPr>
+              <a:t>圣城记</a:t>
+            </a:r>
+            <a:r>
+              <a:rPr lang="en-US" altLang="zh-CN" sz="1600" dirty="0">
+                <a:latin typeface="华文楷体" panose="02010600040101010101" pitchFamily="2" charset="-122"/>
+                <a:ea typeface="华文楷体" panose="02010600040101010101" pitchFamily="2" charset="-122"/>
+              </a:rPr>
+              <a:t>》</a:t>
+            </a:r>
+            <a:r>
+              <a:rPr lang="zh-CN" altLang="en-US" sz="1600" dirty="0">
+                <a:latin typeface="华文楷体" panose="02010600040101010101" pitchFamily="2" charset="-122"/>
+                <a:ea typeface="华文楷体" panose="02010600040101010101" pitchFamily="2" charset="-122"/>
+              </a:rPr>
+              <a:t>童星出道，从影七十余载，参演</a:t>
+            </a:r>
+            <a:r>
+              <a:rPr lang="en-US" altLang="zh-CN" sz="1600" dirty="0">
+                <a:latin typeface="华文楷体" panose="02010600040101010101" pitchFamily="2" charset="-122"/>
+                <a:ea typeface="华文楷体" panose="02010600040101010101" pitchFamily="2" charset="-122"/>
+              </a:rPr>
+              <a:t>《</a:t>
+            </a:r>
+            <a:r>
+              <a:rPr lang="zh-CN" altLang="en-US" sz="1600" dirty="0">
+                <a:latin typeface="华文楷体" panose="02010600040101010101" pitchFamily="2" charset="-122"/>
+                <a:ea typeface="华文楷体" panose="02010600040101010101" pitchFamily="2" charset="-122"/>
+              </a:rPr>
+              <a:t>龙须沟</a:t>
+            </a:r>
+            <a:r>
+              <a:rPr lang="en-US" altLang="zh-CN" sz="1600" dirty="0">
+                <a:latin typeface="华文楷体" panose="02010600040101010101" pitchFamily="2" charset="-122"/>
+                <a:ea typeface="华文楷体" panose="02010600040101010101" pitchFamily="2" charset="-122"/>
+              </a:rPr>
+              <a:t>》《</a:t>
+            </a:r>
+            <a:r>
+              <a:rPr lang="zh-CN" altLang="en-US" sz="1600" dirty="0">
+                <a:latin typeface="华文楷体" panose="02010600040101010101" pitchFamily="2" charset="-122"/>
+                <a:ea typeface="华文楷体" panose="02010600040101010101" pitchFamily="2" charset="-122"/>
+              </a:rPr>
+              <a:t>红色娘子军</a:t>
+            </a:r>
+            <a:r>
+              <a:rPr lang="en-US" altLang="zh-CN" sz="1600" dirty="0">
+                <a:latin typeface="华文楷体" panose="02010600040101010101" pitchFamily="2" charset="-122"/>
+                <a:ea typeface="华文楷体" panose="02010600040101010101" pitchFamily="2" charset="-122"/>
+              </a:rPr>
+              <a:t>》</a:t>
+            </a:r>
+            <a:r>
+              <a:rPr lang="zh-CN" altLang="en-US" sz="1600" dirty="0">
+                <a:latin typeface="华文楷体" panose="02010600040101010101" pitchFamily="2" charset="-122"/>
+                <a:ea typeface="华文楷体" panose="02010600040101010101" pitchFamily="2" charset="-122"/>
+              </a:rPr>
+              <a:t>等经典。</a:t>
+            </a:r>
+            <a:r>
+              <a:rPr lang="en-US" altLang="zh-CN" sz="1600" dirty="0">
+                <a:latin typeface="华文楷体" panose="02010600040101010101" pitchFamily="2" charset="-122"/>
+                <a:ea typeface="华文楷体" panose="02010600040101010101" pitchFamily="2" charset="-122"/>
+              </a:rPr>
+              <a:t>1982</a:t>
+            </a:r>
+            <a:r>
+              <a:rPr lang="zh-CN" altLang="en-US" sz="1600" dirty="0">
+                <a:latin typeface="华文楷体" panose="02010600040101010101" pitchFamily="2" charset="-122"/>
+                <a:ea typeface="华文楷体" panose="02010600040101010101" pitchFamily="2" charset="-122"/>
+              </a:rPr>
+              <a:t>年因在</a:t>
+            </a:r>
+            <a:r>
+              <a:rPr lang="en-US" altLang="zh-CN" sz="1600" dirty="0">
+                <a:latin typeface="华文楷体" panose="02010600040101010101" pitchFamily="2" charset="-122"/>
+                <a:ea typeface="华文楷体" panose="02010600040101010101" pitchFamily="2" charset="-122"/>
+              </a:rPr>
+              <a:t>《</a:t>
+            </a:r>
+            <a:r>
+              <a:rPr lang="zh-CN" altLang="en-US" sz="1600" dirty="0">
+                <a:latin typeface="华文楷体" panose="02010600040101010101" pitchFamily="2" charset="-122"/>
+                <a:ea typeface="华文楷体" panose="02010600040101010101" pitchFamily="2" charset="-122"/>
+              </a:rPr>
+              <a:t>牧马人</a:t>
+            </a:r>
+            <a:r>
+              <a:rPr lang="en-US" altLang="zh-CN" sz="1600" dirty="0">
+                <a:latin typeface="华文楷体" panose="02010600040101010101" pitchFamily="2" charset="-122"/>
+                <a:ea typeface="华文楷体" panose="02010600040101010101" pitchFamily="2" charset="-122"/>
+              </a:rPr>
+              <a:t>》</a:t>
+            </a:r>
+            <a:r>
+              <a:rPr lang="zh-CN" altLang="en-US" sz="1600" dirty="0">
+                <a:latin typeface="华文楷体" panose="02010600040101010101" pitchFamily="2" charset="-122"/>
+                <a:ea typeface="华文楷体" panose="02010600040101010101" pitchFamily="2" charset="-122"/>
+              </a:rPr>
+              <a:t>中饰演“郭谝子”一角，斩获金鸡奖与百花奖双料最佳男配角。他一生甘当绿叶，擅长刻画小人物，晚年仍坚持亲自完成</a:t>
+            </a:r>
+            <a:r>
+              <a:rPr lang="en-US" altLang="zh-CN" sz="1600" dirty="0">
+                <a:latin typeface="华文楷体" panose="02010600040101010101" pitchFamily="2" charset="-122"/>
+                <a:ea typeface="华文楷体" panose="02010600040101010101" pitchFamily="2" charset="-122"/>
+              </a:rPr>
+              <a:t>《</a:t>
+            </a:r>
+            <a:r>
+              <a:rPr lang="zh-CN" altLang="en-US" sz="1600" dirty="0">
+                <a:latin typeface="华文楷体" panose="02010600040101010101" pitchFamily="2" charset="-122"/>
+                <a:ea typeface="华文楷体" panose="02010600040101010101" pitchFamily="2" charset="-122"/>
+              </a:rPr>
+              <a:t>海鸥老人</a:t>
+            </a:r>
+            <a:r>
+              <a:rPr lang="en-US" altLang="zh-CN" sz="1600" dirty="0">
+                <a:latin typeface="华文楷体" panose="02010600040101010101" pitchFamily="2" charset="-122"/>
+                <a:ea typeface="华文楷体" panose="02010600040101010101" pitchFamily="2" charset="-122"/>
+              </a:rPr>
+              <a:t>》</a:t>
+            </a:r>
+            <a:r>
+              <a:rPr lang="zh-CN" altLang="en-US" sz="1600" dirty="0">
+                <a:latin typeface="华文楷体" panose="02010600040101010101" pitchFamily="2" charset="-122"/>
+                <a:ea typeface="华文楷体" panose="02010600040101010101" pitchFamily="2" charset="-122"/>
+              </a:rPr>
+              <a:t>等作品的拍摄。</a:t>
+            </a:r>
+          </a:p>
+          <a:p>
+            <a:endParaRPr lang="zh-CN" altLang="en-US" sz="1600" dirty="0">
+              <a:latin typeface="华文楷体" panose="02010600040101010101" pitchFamily="2" charset="-122"/>
+              <a:ea typeface="华文楷体" panose="02010600040101010101" pitchFamily="2" charset="-122"/>
+            </a:endParaRPr>
+          </a:p>
+          <a:p>
+            <a:r>
+              <a:rPr lang="zh-CN" altLang="en-US" sz="1600" dirty="0">
+                <a:latin typeface="华文楷体" panose="02010600040101010101" pitchFamily="2" charset="-122"/>
+                <a:ea typeface="华文楷体" panose="02010600040101010101" pitchFamily="2" charset="-122"/>
+              </a:rPr>
+              <a:t>荣誉与信仰</a:t>
+            </a:r>
+          </a:p>
+          <a:p>
+            <a:endParaRPr lang="zh-CN" altLang="en-US" sz="1600" dirty="0">
+              <a:latin typeface="华文楷体" panose="02010600040101010101" pitchFamily="2" charset="-122"/>
+              <a:ea typeface="华文楷体" panose="02010600040101010101" pitchFamily="2" charset="-122"/>
+            </a:endParaRPr>
+          </a:p>
+          <a:p>
+            <a:r>
+              <a:rPr lang="en-US" altLang="zh-CN" sz="1600" dirty="0">
+                <a:latin typeface="华文楷体" panose="02010600040101010101" pitchFamily="2" charset="-122"/>
+                <a:ea typeface="华文楷体" panose="02010600040101010101" pitchFamily="2" charset="-122"/>
+              </a:rPr>
+              <a:t>2017</a:t>
+            </a:r>
+            <a:r>
+              <a:rPr lang="zh-CN" altLang="en-US" sz="1600" dirty="0">
+                <a:latin typeface="华文楷体" panose="02010600040101010101" pitchFamily="2" charset="-122"/>
+                <a:ea typeface="华文楷体" panose="02010600040101010101" pitchFamily="2" charset="-122"/>
+              </a:rPr>
+              <a:t>年获中国电影金鸡奖终身成就奖，</a:t>
+            </a:r>
+            <a:r>
+              <a:rPr lang="en-US" altLang="zh-CN" sz="1600" dirty="0">
+                <a:latin typeface="华文楷体" panose="02010600040101010101" pitchFamily="2" charset="-122"/>
+                <a:ea typeface="华文楷体" panose="02010600040101010101" pitchFamily="2" charset="-122"/>
+              </a:rPr>
+              <a:t>2024</a:t>
+            </a:r>
+            <a:r>
+              <a:rPr lang="zh-CN" altLang="en-US" sz="1600" dirty="0">
+                <a:latin typeface="华文楷体" panose="02010600040101010101" pitchFamily="2" charset="-122"/>
+                <a:ea typeface="华文楷体" panose="02010600040101010101" pitchFamily="2" charset="-122"/>
+              </a:rPr>
+              <a:t>年当选“感动中国</a:t>
+            </a:r>
+            <a:r>
+              <a:rPr lang="en-US" altLang="zh-CN" sz="1600" dirty="0">
+                <a:latin typeface="华文楷体" panose="02010600040101010101" pitchFamily="2" charset="-122"/>
+                <a:ea typeface="华文楷体" panose="02010600040101010101" pitchFamily="2" charset="-122"/>
+              </a:rPr>
+              <a:t>2023</a:t>
+            </a:r>
+            <a:r>
+              <a:rPr lang="zh-CN" altLang="en-US" sz="1600" dirty="0">
+                <a:latin typeface="华文楷体" panose="02010600040101010101" pitchFamily="2" charset="-122"/>
+                <a:ea typeface="华文楷体" panose="02010600040101010101" pitchFamily="2" charset="-122"/>
+              </a:rPr>
+              <a:t>年度人物”。他于</a:t>
+            </a:r>
+            <a:r>
+              <a:rPr lang="en-US" altLang="zh-CN" sz="1600" dirty="0">
+                <a:latin typeface="华文楷体" panose="02010600040101010101" pitchFamily="2" charset="-122"/>
+                <a:ea typeface="华文楷体" panose="02010600040101010101" pitchFamily="2" charset="-122"/>
+              </a:rPr>
+              <a:t>2018</a:t>
+            </a:r>
+            <a:r>
+              <a:rPr lang="zh-CN" altLang="en-US" sz="1600" dirty="0">
+                <a:latin typeface="华文楷体" panose="02010600040101010101" pitchFamily="2" charset="-122"/>
+                <a:ea typeface="华文楷体" panose="02010600040101010101" pitchFamily="2" charset="-122"/>
+              </a:rPr>
+              <a:t>年以</a:t>
+            </a:r>
+            <a:r>
+              <a:rPr lang="en-US" altLang="zh-CN" sz="1600" dirty="0">
+                <a:latin typeface="华文楷体" panose="02010600040101010101" pitchFamily="2" charset="-122"/>
+                <a:ea typeface="华文楷体" panose="02010600040101010101" pitchFamily="2" charset="-122"/>
+              </a:rPr>
+              <a:t>83</a:t>
+            </a:r>
+            <a:r>
+              <a:rPr lang="zh-CN" altLang="en-US" sz="1600" dirty="0">
+                <a:latin typeface="华文楷体" panose="02010600040101010101" pitchFamily="2" charset="-122"/>
+                <a:ea typeface="华文楷体" panose="02010600040101010101" pitchFamily="2" charset="-122"/>
+              </a:rPr>
+              <a:t>岁高龄加入中国共产党，践行“演好戏、做好人”的艺德追求。</a:t>
             </a:r>
           </a:p>
         </p:txBody>
@@ -5985,13 +6533,25 @@
     </p:spTree>
     <p:extLst>
       <p:ext uri="{BB962C8B-B14F-4D97-AF65-F5344CB8AC3E}">
-        <p14:creationId xmlns:p14="http://schemas.microsoft.com/office/powerpoint/2010/main" val="1859386732"/>
+        <p14:creationId xmlns:p14="http://schemas.microsoft.com/office/powerpoint/2010/main" val="1607882764"/>
       </p:ext>
     </p:extLst>
   </p:cSld>
   <p:clrMapOvr>
     <a:masterClrMapping/>
   </p:clrMapOvr>
+  <mc:AlternateContent xmlns:mc="http://schemas.openxmlformats.org/markup-compatibility/2006">
+    <mc:Choice xmlns:p159="http://schemas.microsoft.com/office/powerpoint/2015/09/main" Requires="p159">
+      <p:transition xmlns:p14="http://schemas.microsoft.com/office/powerpoint/2010/main" spd="slow" p14:dur="1250">
+        <p159:morph option="byObject"/>
+      </p:transition>
+    </mc:Choice>
+    <mc:Fallback>
+      <p:transition spd="slow">
+        <p:fade/>
+      </p:transition>
+    </mc:Fallback>
+  </mc:AlternateContent>
 </p:sld>
 </file>
 
@@ -6017,7 +6577,7 @@
           <p:cNvPr id="2" name="标题 1">
             <a:extLst>
               <a:ext uri="{FF2B5EF4-FFF2-40B4-BE49-F238E27FC236}">
-                <a16:creationId xmlns:a16="http://schemas.microsoft.com/office/drawing/2014/main" id="{8F46A6FE-B301-BD23-EC37-EF441538E981}"/>
+                <a16:creationId xmlns:a16="http://schemas.microsoft.com/office/drawing/2014/main" id="{EBA7C8F1-4749-4D64-7FD8-2DB2E21F5AA7}"/>
               </a:ext>
             </a:extLst>
           </p:cNvPr>
@@ -6031,17 +6591,18 @@
         <p:spPr/>
         <p:txBody>
           <a:bodyPr>
-            <a:noAutofit/>
+            <a:normAutofit/>
           </a:bodyPr>
           <a:lstStyle/>
           <a:p>
             <a:r>
-              <a:rPr lang="zh-CN" altLang="en-US" sz="12500" dirty="0">
-                <a:latin typeface="楷体" panose="02010609060101010101" pitchFamily="49" charset="-122"/>
-                <a:ea typeface="楷体" panose="02010609060101010101" pitchFamily="49" charset="-122"/>
-              </a:rPr>
-              <a:t>谢谢大家</a:t>
-            </a:r>
+              <a:rPr lang="zh-CN" altLang="en-US" sz="5400" dirty="0">
+                <a:latin typeface="华文楷体" panose="02010600040101010101" pitchFamily="2" charset="-122"/>
+                <a:ea typeface="华文楷体" panose="02010600040101010101" pitchFamily="2" charset="-122"/>
+              </a:rPr>
+              <a:t>十、牛字字义</a:t>
+            </a:r>
+            <a:endParaRPr lang="zh-CN" altLang="en-US" sz="5400" dirty="0"/>
           </a:p>
         </p:txBody>
       </p:sp>
@@ -6050,7 +6611,7 @@
           <p:cNvPr id="3" name="文本占位符 2">
             <a:extLst>
               <a:ext uri="{FF2B5EF4-FFF2-40B4-BE49-F238E27FC236}">
-                <a16:creationId xmlns:a16="http://schemas.microsoft.com/office/drawing/2014/main" id="{D1E3E886-5CFE-3F5D-4FFC-DA28660FA886}"/>
+                <a16:creationId xmlns:a16="http://schemas.microsoft.com/office/drawing/2014/main" id="{D1F0017D-BF83-83E0-10AF-032F87A0D5C2}"/>
               </a:ext>
             </a:extLst>
           </p:cNvPr>
@@ -6058,105 +6619,40 @@
             <a:spLocks noGrp="1"/>
           </p:cNvSpPr>
           <p:nvPr>
-            <p:ph type="body" sz="quarter" idx="13"/>
+            <p:ph type="body" sz="quarter" idx="1"/>
           </p:nvPr>
         </p:nvSpPr>
-        <p:spPr>
-          <a:xfrm>
-            <a:off x="0" y="4708754"/>
-            <a:ext cx="834119" cy="234722"/>
-          </a:xfrm>
-        </p:spPr>
+        <p:spPr/>
         <p:txBody>
-          <a:bodyPr>
-            <a:normAutofit fontScale="92500"/>
-          </a:bodyPr>
+          <a:bodyPr/>
           <a:lstStyle/>
           <a:p>
-            <a:r>
-              <a:rPr lang="zh-CN" altLang="en-US" sz="1000" dirty="0"/>
-              <a:t>非</a:t>
-            </a:r>
-            <a:r>
-              <a:rPr lang="en-US" altLang="zh-CN" sz="1000" dirty="0"/>
-              <a:t>AIGC</a:t>
-            </a:r>
-            <a:r>
-              <a:rPr lang="zh-CN" altLang="en-US" sz="1000" dirty="0"/>
-              <a:t>制作</a:t>
-            </a:r>
-          </a:p>
-        </p:txBody>
-      </p:sp>
-      <p:sp>
-        <p:nvSpPr>
-          <p:cNvPr id="6" name="文本框 5">
-            <a:extLst>
-              <a:ext uri="{FF2B5EF4-FFF2-40B4-BE49-F238E27FC236}">
-                <a16:creationId xmlns:a16="http://schemas.microsoft.com/office/drawing/2014/main" id="{6D01B9B6-EBBF-F414-5BC9-A252EED63053}"/>
-              </a:ext>
-            </a:extLst>
-          </p:cNvPr>
-          <p:cNvSpPr txBox="1"/>
-          <p:nvPr/>
-        </p:nvSpPr>
-        <p:spPr>
-          <a:xfrm>
-            <a:off x="0" y="4363031"/>
-            <a:ext cx="1838324" cy="276999"/>
-          </a:xfrm>
-          <a:prstGeom prst="rect">
-            <a:avLst/>
-          </a:prstGeom>
-          <a:noFill/>
-        </p:spPr>
-        <p:txBody>
-          <a:bodyPr wrap="square" rtlCol="0">
-            <a:spAutoFit/>
-          </a:bodyPr>
-          <a:lstStyle/>
-          <a:p>
-            <a:r>
-              <a:rPr lang="en-US" altLang="zh-CN" sz="1200" b="1" dirty="0">
-                <a:latin typeface="华文楷体" panose="02010600040101010101" pitchFamily="2" charset="-122"/>
-                <a:ea typeface="华文楷体" panose="02010600040101010101" pitchFamily="2" charset="-122"/>
-              </a:rPr>
-              <a:t>©</a:t>
-            </a:r>
-            <a:r>
-              <a:rPr lang="en-US" altLang="zh-CN" sz="1200" dirty="0" err="1">
-                <a:latin typeface="华文楷体" panose="02010600040101010101" pitchFamily="2" charset="-122"/>
-                <a:ea typeface="华文楷体" panose="02010600040101010101" pitchFamily="2" charset="-122"/>
-              </a:rPr>
-              <a:t>CopyRight</a:t>
-            </a:r>
-            <a:r>
-              <a:rPr lang="en-US" altLang="zh-CN" sz="1200" dirty="0">
-                <a:latin typeface="华文楷体" panose="02010600040101010101" pitchFamily="2" charset="-122"/>
-                <a:ea typeface="华文楷体" panose="02010600040101010101" pitchFamily="2" charset="-122"/>
-              </a:rPr>
-              <a:t> 2026 </a:t>
-            </a:r>
-            <a:r>
-              <a:rPr lang="zh-CN" altLang="en-US" sz="1200" dirty="0">
-                <a:latin typeface="华文楷体" panose="02010600040101010101" pitchFamily="2" charset="-122"/>
-                <a:ea typeface="华文楷体" panose="02010600040101010101" pitchFamily="2" charset="-122"/>
-              </a:rPr>
-              <a:t>缪江铭</a:t>
-            </a:r>
+            <a:endParaRPr lang="zh-CN" altLang="en-US"/>
           </a:p>
         </p:txBody>
       </p:sp>
     </p:spTree>
     <p:extLst>
       <p:ext uri="{BB962C8B-B14F-4D97-AF65-F5344CB8AC3E}">
-        <p14:creationId xmlns:p14="http://schemas.microsoft.com/office/powerpoint/2010/main" val="2755718051"/>
+        <p14:creationId xmlns:p14="http://schemas.microsoft.com/office/powerpoint/2010/main" val="1017413984"/>
       </p:ext>
     </p:extLst>
   </p:cSld>
   <p:clrMapOvr>
     <a:masterClrMapping/>
   </p:clrMapOvr>
+  <mc:AlternateContent xmlns:mc="http://schemas.openxmlformats.org/markup-compatibility/2006">
+    <mc:Choice xmlns:p159="http://schemas.microsoft.com/office/powerpoint/2015/09/main" Requires="p159">
+      <p:transition xmlns:p14="http://schemas.microsoft.com/office/powerpoint/2010/main" spd="slow" p14:dur="1250">
+        <p159:morph option="byObject"/>
+      </p:transition>
+    </mc:Choice>
+    <mc:Fallback>
+      <p:transition spd="slow">
+        <p:fade/>
+      </p:transition>
+    </mc:Fallback>
+  </mc:AlternateContent>
 </p:sld>
 </file>
 
@@ -6229,8 +6725,8 @@
         </p:nvSpPr>
         <p:spPr>
           <a:xfrm>
-            <a:off x="457200" y="1294108"/>
-            <a:ext cx="10104895" cy="5016758"/>
+            <a:off x="821410" y="1139125"/>
+            <a:ext cx="10104895" cy="5509200"/>
           </a:xfrm>
           <a:prstGeom prst="rect">
             <a:avLst/>
@@ -6386,13 +6882,6 @@
             </a:endParaRPr>
           </a:p>
           <a:p>
-            <a:r>
-              <a:rPr lang="zh-CN" altLang="en-US" sz="3200" dirty="0">
-                <a:latin typeface="华文楷体" panose="02010600040101010101" pitchFamily="2" charset="-122"/>
-                <a:ea typeface="华文楷体" panose="02010600040101010101" pitchFamily="2" charset="-122"/>
-              </a:rPr>
-              <a:t>七、牛字的一些俗语    </a:t>
-            </a:r>
             <a:endParaRPr lang="en-US" altLang="zh-CN" sz="3200" dirty="0">
               <a:latin typeface="华文楷体" panose="02010600040101010101" pitchFamily="2" charset="-122"/>
               <a:ea typeface="华文楷体" panose="02010600040101010101" pitchFamily="2" charset="-122"/>
@@ -6404,7 +6893,7 @@
                 <a:latin typeface="华文楷体" panose="02010600040101010101" pitchFamily="2" charset="-122"/>
                 <a:ea typeface="华文楷体" panose="02010600040101010101" pitchFamily="2" charset="-122"/>
               </a:rPr>
-              <a:t> 八、书写</a:t>
+              <a:t>七、牛字的一些俗语    </a:t>
             </a:r>
             <a:endParaRPr lang="en-US" altLang="zh-CN" sz="3200" dirty="0">
               <a:latin typeface="华文楷体" panose="02010600040101010101" pitchFamily="2" charset="-122"/>
@@ -6417,7 +6906,34 @@
                 <a:latin typeface="华文楷体" panose="02010600040101010101" pitchFamily="2" charset="-122"/>
                 <a:ea typeface="华文楷体" panose="02010600040101010101" pitchFamily="2" charset="-122"/>
               </a:rPr>
-              <a:t>九、结尾</a:t>
+              <a:t> 八、书写          九、牛姓名人 </a:t>
+            </a:r>
+            <a:r>
+              <a:rPr lang="en-US" altLang="zh-CN" sz="3200" dirty="0">
+                <a:latin typeface="华文楷体" panose="02010600040101010101" pitchFamily="2" charset="-122"/>
+                <a:ea typeface="华文楷体" panose="02010600040101010101" pitchFamily="2" charset="-122"/>
+              </a:rPr>
+              <a:t>		</a:t>
+            </a:r>
+            <a:r>
+              <a:rPr lang="zh-CN" altLang="en-US" sz="3200" dirty="0">
+                <a:latin typeface="华文楷体" panose="02010600040101010101" pitchFamily="2" charset="-122"/>
+                <a:ea typeface="华文楷体" panose="02010600040101010101" pitchFamily="2" charset="-122"/>
+              </a:rPr>
+              <a:t>十、牛字字义</a:t>
+            </a:r>
+            <a:endParaRPr lang="en-US" altLang="zh-CN" sz="3200" dirty="0">
+              <a:latin typeface="华文楷体" panose="02010600040101010101" pitchFamily="2" charset="-122"/>
+              <a:ea typeface="华文楷体" panose="02010600040101010101" pitchFamily="2" charset="-122"/>
+            </a:endParaRPr>
+          </a:p>
+          <a:p>
+            <a:r>
+              <a:rPr lang="zh-CN" altLang="en-US" sz="3200" dirty="0">
+                <a:latin typeface="华文楷体" panose="02010600040101010101" pitchFamily="2" charset="-122"/>
+                <a:ea typeface="华文楷体" panose="02010600040101010101" pitchFamily="2" charset="-122"/>
+              </a:rPr>
+              <a:t>十一、结尾</a:t>
             </a:r>
           </a:p>
         </p:txBody>
@@ -6432,6 +6948,753 @@
   <p:clrMapOvr>
     <a:masterClrMapping/>
   </p:clrMapOvr>
+  <mc:AlternateContent xmlns:mc="http://schemas.openxmlformats.org/markup-compatibility/2006">
+    <mc:Choice xmlns:p159="http://schemas.microsoft.com/office/powerpoint/2015/09/main" Requires="p159">
+      <p:transition xmlns:p14="http://schemas.microsoft.com/office/powerpoint/2010/main" spd="slow" p14:dur="1250">
+        <p159:morph option="byObject"/>
+      </p:transition>
+    </mc:Choice>
+    <mc:Fallback>
+      <p:transition spd="slow">
+        <p:fade/>
+      </p:transition>
+    </mc:Fallback>
+  </mc:AlternateContent>
+</p:sld>
+</file>
+
+<file path=ppt/slides/slide20.xml><?xml version="1.0" encoding="utf-8"?>
+<p:sld xmlns:a="http://schemas.openxmlformats.org/drawingml/2006/main" xmlns:r="http://schemas.openxmlformats.org/officeDocument/2006/relationships" xmlns:p="http://schemas.openxmlformats.org/presentationml/2006/main">
+  <p:cSld>
+    <p:spTree>
+      <p:nvGrpSpPr>
+        <p:cNvPr id="1" name=""/>
+        <p:cNvGrpSpPr/>
+        <p:nvPr/>
+      </p:nvGrpSpPr>
+      <p:grpSpPr>
+        <a:xfrm>
+          <a:off x="0" y="0"/>
+          <a:ext cx="0" cy="0"/>
+          <a:chOff x="0" y="0"/>
+          <a:chExt cx="0" cy="0"/>
+        </a:xfrm>
+      </p:grpSpPr>
+      <p:sp>
+        <p:nvSpPr>
+          <p:cNvPr id="2" name="标题 1">
+            <a:extLst>
+              <a:ext uri="{FF2B5EF4-FFF2-40B4-BE49-F238E27FC236}">
+                <a16:creationId xmlns:a16="http://schemas.microsoft.com/office/drawing/2014/main" id="{E3CB1694-2689-D096-6B35-A695AD4589B7}"/>
+              </a:ext>
+            </a:extLst>
+          </p:cNvPr>
+          <p:cNvSpPr>
+            <a:spLocks noGrp="1"/>
+          </p:cNvSpPr>
+          <p:nvPr>
+            <p:ph type="title"/>
+          </p:nvPr>
+        </p:nvSpPr>
+        <p:spPr/>
+        <p:txBody>
+          <a:bodyPr>
+            <a:normAutofit/>
+          </a:bodyPr>
+          <a:lstStyle/>
+          <a:p>
+            <a:r>
+              <a:rPr lang="zh-CN" altLang="en-US" sz="3200" dirty="0">
+                <a:latin typeface="华文楷体" panose="02010600040101010101" pitchFamily="2" charset="-122"/>
+                <a:ea typeface="华文楷体" panose="02010600040101010101" pitchFamily="2" charset="-122"/>
+              </a:rPr>
+              <a:t>十、牛字字义</a:t>
+            </a:r>
+            <a:endParaRPr lang="zh-CN" altLang="en-US" sz="3200" dirty="0"/>
+          </a:p>
+        </p:txBody>
+      </p:sp>
+      <p:sp>
+        <p:nvSpPr>
+          <p:cNvPr id="3" name="文本框 2">
+            <a:extLst>
+              <a:ext uri="{FF2B5EF4-FFF2-40B4-BE49-F238E27FC236}">
+                <a16:creationId xmlns:a16="http://schemas.microsoft.com/office/drawing/2014/main" id="{733EAD8F-0503-D2B2-DE86-BD148DB9BC89}"/>
+              </a:ext>
+            </a:extLst>
+          </p:cNvPr>
+          <p:cNvSpPr txBox="1"/>
+          <p:nvPr/>
+        </p:nvSpPr>
+        <p:spPr>
+          <a:xfrm>
+            <a:off x="0" y="1247614"/>
+            <a:ext cx="12192000" cy="5693866"/>
+          </a:xfrm>
+          <a:prstGeom prst="rect">
+            <a:avLst/>
+          </a:prstGeom>
+          <a:noFill/>
+        </p:spPr>
+        <p:txBody>
+          <a:bodyPr wrap="square" rtlCol="0">
+            <a:spAutoFit/>
+          </a:bodyPr>
+          <a:lstStyle/>
+          <a:p>
+            <a:r>
+              <a:rPr lang="zh-CN" altLang="en-US" sz="2800" dirty="0">
+                <a:latin typeface="华文楷体" panose="02010600040101010101" pitchFamily="2" charset="-122"/>
+                <a:ea typeface="华文楷体" panose="02010600040101010101" pitchFamily="2" charset="-122"/>
+              </a:rPr>
+              <a:t>“牛”字含义可归纳为五类：</a:t>
+            </a:r>
+          </a:p>
+          <a:p>
+            <a:r>
+              <a:rPr lang="en-US" altLang="zh-CN" sz="2800" dirty="0">
+                <a:latin typeface="华文楷体" panose="02010600040101010101" pitchFamily="2" charset="-122"/>
+                <a:ea typeface="华文楷体" panose="02010600040101010101" pitchFamily="2" charset="-122"/>
+              </a:rPr>
+              <a:t>1. </a:t>
+            </a:r>
+            <a:r>
+              <a:rPr lang="zh-CN" altLang="en-US" sz="2800" dirty="0">
+                <a:latin typeface="华文楷体" panose="02010600040101010101" pitchFamily="2" charset="-122"/>
+                <a:ea typeface="华文楷体" panose="02010600040101010101" pitchFamily="2" charset="-122"/>
+              </a:rPr>
+              <a:t>本义：家畜黄牛，泛指牛科动物。</a:t>
+            </a:r>
+          </a:p>
+          <a:p>
+            <a:r>
+              <a:rPr lang="en-US" altLang="zh-CN" sz="2800" dirty="0">
+                <a:latin typeface="华文楷体" panose="02010600040101010101" pitchFamily="2" charset="-122"/>
+                <a:ea typeface="华文楷体" panose="02010600040101010101" pitchFamily="2" charset="-122"/>
+              </a:rPr>
+              <a:t>2. </a:t>
+            </a:r>
+            <a:r>
+              <a:rPr lang="zh-CN" altLang="en-US" sz="2800" dirty="0">
+                <a:latin typeface="华文楷体" panose="02010600040101010101" pitchFamily="2" charset="-122"/>
+                <a:ea typeface="华文楷体" panose="02010600040101010101" pitchFamily="2" charset="-122"/>
+              </a:rPr>
+              <a:t>象征与引申：</a:t>
+            </a:r>
+          </a:p>
+          <a:p>
+            <a:r>
+              <a:rPr lang="zh-CN" altLang="en-US" sz="2800" dirty="0">
+                <a:latin typeface="华文楷体" panose="02010600040101010101" pitchFamily="2" charset="-122"/>
+                <a:ea typeface="华文楷体" panose="02010600040101010101" pitchFamily="2" charset="-122"/>
+              </a:rPr>
+              <a:t>  ◦ 力量</a:t>
+            </a:r>
+            <a:r>
+              <a:rPr lang="en-US" altLang="zh-CN" sz="2800" dirty="0">
+                <a:latin typeface="华文楷体" panose="02010600040101010101" pitchFamily="2" charset="-122"/>
+                <a:ea typeface="华文楷体" panose="02010600040101010101" pitchFamily="2" charset="-122"/>
+              </a:rPr>
+              <a:t>/</a:t>
+            </a:r>
+            <a:r>
+              <a:rPr lang="zh-CN" altLang="en-US" sz="2800" dirty="0">
+                <a:latin typeface="华文楷体" panose="02010600040101010101" pitchFamily="2" charset="-122"/>
+                <a:ea typeface="华文楷体" panose="02010600040101010101" pitchFamily="2" charset="-122"/>
+              </a:rPr>
+              <a:t>勤劳：如“老黄牛精神”。</a:t>
+            </a:r>
+          </a:p>
+          <a:p>
+            <a:r>
+              <a:rPr lang="zh-CN" altLang="en-US" sz="2800" dirty="0">
+                <a:latin typeface="华文楷体" panose="02010600040101010101" pitchFamily="2" charset="-122"/>
+                <a:ea typeface="华文楷体" panose="02010600040101010101" pitchFamily="2" charset="-122"/>
+              </a:rPr>
+              <a:t>  ◦ 固执</a:t>
+            </a:r>
+            <a:r>
+              <a:rPr lang="en-US" altLang="zh-CN" sz="2800" dirty="0">
+                <a:latin typeface="华文楷体" panose="02010600040101010101" pitchFamily="2" charset="-122"/>
+                <a:ea typeface="华文楷体" panose="02010600040101010101" pitchFamily="2" charset="-122"/>
+              </a:rPr>
+              <a:t>/</a:t>
+            </a:r>
+            <a:r>
+              <a:rPr lang="zh-CN" altLang="en-US" sz="2800" dirty="0">
+                <a:latin typeface="华文楷体" panose="02010600040101010101" pitchFamily="2" charset="-122"/>
+                <a:ea typeface="华文楷体" panose="02010600040101010101" pitchFamily="2" charset="-122"/>
+              </a:rPr>
+              <a:t>骄傲：如“牛脾气”。</a:t>
+            </a:r>
+          </a:p>
+          <a:p>
+            <a:r>
+              <a:rPr lang="zh-CN" altLang="en-US" sz="2800" dirty="0">
+                <a:latin typeface="华文楷体" panose="02010600040101010101" pitchFamily="2" charset="-122"/>
+                <a:ea typeface="华文楷体" panose="02010600040101010101" pitchFamily="2" charset="-122"/>
+              </a:rPr>
+              <a:t>  ◦ 上涨行情：股市“牛市”。</a:t>
+            </a:r>
+          </a:p>
+          <a:p>
+            <a:r>
+              <a:rPr lang="en-US" altLang="zh-CN" sz="2800" dirty="0">
+                <a:latin typeface="华文楷体" panose="02010600040101010101" pitchFamily="2" charset="-122"/>
+                <a:ea typeface="华文楷体" panose="02010600040101010101" pitchFamily="2" charset="-122"/>
+              </a:rPr>
+              <a:t>3. </a:t>
+            </a:r>
+            <a:r>
+              <a:rPr lang="zh-CN" altLang="en-US" sz="2800" dirty="0">
+                <a:latin typeface="华文楷体" panose="02010600040101010101" pitchFamily="2" charset="-122"/>
+                <a:ea typeface="华文楷体" panose="02010600040101010101" pitchFamily="2" charset="-122"/>
+              </a:rPr>
+              <a:t>科学单位：力的单位“牛顿”简称</a:t>
+            </a:r>
+            <a:r>
+              <a:rPr lang="en-US" altLang="zh-CN" sz="2800" dirty="0">
+                <a:latin typeface="华文楷体" panose="02010600040101010101" pitchFamily="2" charset="-122"/>
+                <a:ea typeface="华文楷体" panose="02010600040101010101" pitchFamily="2" charset="-122"/>
+              </a:rPr>
+              <a:t>N</a:t>
+            </a:r>
+            <a:r>
+              <a:rPr lang="zh-CN" altLang="en-US" sz="2800" dirty="0">
+                <a:latin typeface="华文楷体" panose="02010600040101010101" pitchFamily="2" charset="-122"/>
+                <a:ea typeface="华文楷体" panose="02010600040101010101" pitchFamily="2" charset="-122"/>
+              </a:rPr>
+              <a:t>，中文俗称“牛”。</a:t>
+            </a:r>
+          </a:p>
+          <a:p>
+            <a:r>
+              <a:rPr lang="en-US" altLang="zh-CN" sz="2800" dirty="0">
+                <a:latin typeface="华文楷体" panose="02010600040101010101" pitchFamily="2" charset="-122"/>
+                <a:ea typeface="华文楷体" panose="02010600040101010101" pitchFamily="2" charset="-122"/>
+              </a:rPr>
+              <a:t>4. </a:t>
+            </a:r>
+            <a:r>
+              <a:rPr lang="zh-CN" altLang="en-US" sz="2800" dirty="0">
+                <a:latin typeface="华文楷体" panose="02010600040101010101" pitchFamily="2" charset="-122"/>
+                <a:ea typeface="华文楷体" panose="02010600040101010101" pitchFamily="2" charset="-122"/>
+              </a:rPr>
+              <a:t>传统文化：</a:t>
+            </a:r>
+          </a:p>
+          <a:p>
+            <a:r>
+              <a:rPr lang="zh-CN" altLang="en-US" sz="2800" dirty="0">
+                <a:latin typeface="华文楷体" panose="02010600040101010101" pitchFamily="2" charset="-122"/>
+                <a:ea typeface="华文楷体" panose="02010600040101010101" pitchFamily="2" charset="-122"/>
+              </a:rPr>
+              <a:t>  ◦ 星宿：二十八星宿之“牛宿”。</a:t>
+            </a:r>
+          </a:p>
+          <a:p>
+            <a:r>
+              <a:rPr lang="zh-CN" altLang="en-US" sz="2800" dirty="0">
+                <a:latin typeface="华文楷体" panose="02010600040101010101" pitchFamily="2" charset="-122"/>
+                <a:ea typeface="华文楷体" panose="02010600040101010101" pitchFamily="2" charset="-122"/>
+              </a:rPr>
+              <a:t>  ◦ 地支：对应“丑”。</a:t>
+            </a:r>
+          </a:p>
+          <a:p>
+            <a:r>
+              <a:rPr lang="en-US" altLang="zh-CN" sz="2800" dirty="0">
+                <a:latin typeface="华文楷体" panose="02010600040101010101" pitchFamily="2" charset="-122"/>
+                <a:ea typeface="华文楷体" panose="02010600040101010101" pitchFamily="2" charset="-122"/>
+              </a:rPr>
+              <a:t>5. </a:t>
+            </a:r>
+            <a:r>
+              <a:rPr lang="zh-CN" altLang="en-US" sz="2800" dirty="0">
+                <a:latin typeface="华文楷体" panose="02010600040101010101" pitchFamily="2" charset="-122"/>
+                <a:ea typeface="华文楷体" panose="02010600040101010101" pitchFamily="2" charset="-122"/>
+              </a:rPr>
+              <a:t>社会应用：</a:t>
+            </a:r>
+          </a:p>
+          <a:p>
+            <a:r>
+              <a:rPr lang="zh-CN" altLang="en-US" sz="2800" dirty="0">
+                <a:latin typeface="华文楷体" panose="02010600040101010101" pitchFamily="2" charset="-122"/>
+                <a:ea typeface="华文楷体" panose="02010600040101010101" pitchFamily="2" charset="-122"/>
+              </a:rPr>
+              <a:t>  ◦ 姓氏：常见姓氏。</a:t>
+            </a:r>
+          </a:p>
+          <a:p>
+            <a:r>
+              <a:rPr lang="zh-CN" altLang="en-US" sz="2800" dirty="0">
+                <a:latin typeface="华文楷体" panose="02010600040101010101" pitchFamily="2" charset="-122"/>
+                <a:ea typeface="华文楷体" panose="02010600040101010101" pitchFamily="2" charset="-122"/>
+              </a:rPr>
+              <a:t>  ◦ 口语：形容厉害（如“你真牛”）。</a:t>
+            </a:r>
+          </a:p>
+        </p:txBody>
+      </p:sp>
+    </p:spTree>
+    <p:extLst>
+      <p:ext uri="{BB962C8B-B14F-4D97-AF65-F5344CB8AC3E}">
+        <p14:creationId xmlns:p14="http://schemas.microsoft.com/office/powerpoint/2010/main" val="2069371861"/>
+      </p:ext>
+    </p:extLst>
+  </p:cSld>
+  <p:clrMapOvr>
+    <a:masterClrMapping/>
+  </p:clrMapOvr>
+  <mc:AlternateContent xmlns:mc="http://schemas.openxmlformats.org/markup-compatibility/2006">
+    <mc:Choice xmlns:p159="http://schemas.microsoft.com/office/powerpoint/2015/09/main" Requires="p159">
+      <p:transition xmlns:p14="http://schemas.microsoft.com/office/powerpoint/2010/main" spd="slow" p14:dur="1250">
+        <p159:morph option="byObject"/>
+      </p:transition>
+    </mc:Choice>
+    <mc:Fallback>
+      <p:transition spd="slow">
+        <p:fade/>
+      </p:transition>
+    </mc:Fallback>
+  </mc:AlternateContent>
+</p:sld>
+</file>
+
+<file path=ppt/slides/slide21.xml><?xml version="1.0" encoding="utf-8"?>
+<p:sld xmlns:a="http://schemas.openxmlformats.org/drawingml/2006/main" xmlns:r="http://schemas.openxmlformats.org/officeDocument/2006/relationships" xmlns:p="http://schemas.openxmlformats.org/presentationml/2006/main">
+  <p:cSld>
+    <p:spTree>
+      <p:nvGrpSpPr>
+        <p:cNvPr id="1" name=""/>
+        <p:cNvGrpSpPr/>
+        <p:nvPr/>
+      </p:nvGrpSpPr>
+      <p:grpSpPr>
+        <a:xfrm>
+          <a:off x="0" y="0"/>
+          <a:ext cx="0" cy="0"/>
+          <a:chOff x="0" y="0"/>
+          <a:chExt cx="0" cy="0"/>
+        </a:xfrm>
+      </p:grpSpPr>
+      <p:sp>
+        <p:nvSpPr>
+          <p:cNvPr id="2" name="标题 1">
+            <a:extLst>
+              <a:ext uri="{FF2B5EF4-FFF2-40B4-BE49-F238E27FC236}">
+                <a16:creationId xmlns:a16="http://schemas.microsoft.com/office/drawing/2014/main" id="{7062D397-7499-940F-D87B-DFABD9001F78}"/>
+              </a:ext>
+            </a:extLst>
+          </p:cNvPr>
+          <p:cNvSpPr>
+            <a:spLocks noGrp="1"/>
+          </p:cNvSpPr>
+          <p:nvPr>
+            <p:ph type="title"/>
+          </p:nvPr>
+        </p:nvSpPr>
+        <p:spPr/>
+        <p:txBody>
+          <a:bodyPr>
+            <a:normAutofit/>
+          </a:bodyPr>
+          <a:lstStyle/>
+          <a:p>
+            <a:r>
+              <a:rPr lang="zh-CN" altLang="en-US" sz="8000" dirty="0">
+                <a:latin typeface="楷体" panose="02010609060101010101" pitchFamily="49" charset="-122"/>
+                <a:ea typeface="楷体" panose="02010609060101010101" pitchFamily="49" charset="-122"/>
+              </a:rPr>
+              <a:t>十、结尾</a:t>
+            </a:r>
+          </a:p>
+        </p:txBody>
+      </p:sp>
+      <p:sp>
+        <p:nvSpPr>
+          <p:cNvPr id="3" name="文本占位符 2">
+            <a:extLst>
+              <a:ext uri="{FF2B5EF4-FFF2-40B4-BE49-F238E27FC236}">
+                <a16:creationId xmlns:a16="http://schemas.microsoft.com/office/drawing/2014/main" id="{F5F317FC-781B-FD1A-DDDD-5D0961F055BA}"/>
+              </a:ext>
+            </a:extLst>
+          </p:cNvPr>
+          <p:cNvSpPr>
+            <a:spLocks noGrp="1"/>
+          </p:cNvSpPr>
+          <p:nvPr>
+            <p:ph type="body" sz="quarter" idx="1"/>
+          </p:nvPr>
+        </p:nvSpPr>
+        <p:spPr/>
+        <p:txBody>
+          <a:bodyPr/>
+          <a:lstStyle/>
+          <a:p>
+            <a:endParaRPr lang="zh-CN" altLang="en-US"/>
+          </a:p>
+        </p:txBody>
+      </p:sp>
+    </p:spTree>
+    <p:extLst>
+      <p:ext uri="{BB962C8B-B14F-4D97-AF65-F5344CB8AC3E}">
+        <p14:creationId xmlns:p14="http://schemas.microsoft.com/office/powerpoint/2010/main" val="1980493189"/>
+      </p:ext>
+    </p:extLst>
+  </p:cSld>
+  <p:clrMapOvr>
+    <a:masterClrMapping/>
+  </p:clrMapOvr>
+  <mc:AlternateContent xmlns:mc="http://schemas.openxmlformats.org/markup-compatibility/2006">
+    <mc:Choice xmlns:p159="http://schemas.microsoft.com/office/powerpoint/2015/09/main" Requires="p159">
+      <p:transition xmlns:p14="http://schemas.microsoft.com/office/powerpoint/2010/main" spd="slow" p14:dur="1250">
+        <p159:morph option="byObject"/>
+      </p:transition>
+    </mc:Choice>
+    <mc:Fallback>
+      <p:transition spd="slow">
+        <p:fade/>
+      </p:transition>
+    </mc:Fallback>
+  </mc:AlternateContent>
+</p:sld>
+</file>
+
+<file path=ppt/slides/slide22.xml><?xml version="1.0" encoding="utf-8"?>
+<p:sld xmlns:a="http://schemas.openxmlformats.org/drawingml/2006/main" xmlns:r="http://schemas.openxmlformats.org/officeDocument/2006/relationships" xmlns:p="http://schemas.openxmlformats.org/presentationml/2006/main">
+  <p:cSld>
+    <p:spTree>
+      <p:nvGrpSpPr>
+        <p:cNvPr id="1" name=""/>
+        <p:cNvGrpSpPr/>
+        <p:nvPr/>
+      </p:nvGrpSpPr>
+      <p:grpSpPr>
+        <a:xfrm>
+          <a:off x="0" y="0"/>
+          <a:ext cx="0" cy="0"/>
+          <a:chOff x="0" y="0"/>
+          <a:chExt cx="0" cy="0"/>
+        </a:xfrm>
+      </p:grpSpPr>
+      <p:sp>
+        <p:nvSpPr>
+          <p:cNvPr id="2" name="标题 1">
+            <a:extLst>
+              <a:ext uri="{FF2B5EF4-FFF2-40B4-BE49-F238E27FC236}">
+                <a16:creationId xmlns:a16="http://schemas.microsoft.com/office/drawing/2014/main" id="{306992D3-FAB9-480C-3A55-608422EC2928}"/>
+              </a:ext>
+            </a:extLst>
+          </p:cNvPr>
+          <p:cNvSpPr>
+            <a:spLocks noGrp="1"/>
+          </p:cNvSpPr>
+          <p:nvPr>
+            <p:ph type="title"/>
+          </p:nvPr>
+        </p:nvSpPr>
+        <p:spPr/>
+        <p:txBody>
+          <a:bodyPr>
+            <a:normAutofit/>
+          </a:bodyPr>
+          <a:lstStyle/>
+          <a:p>
+            <a:r>
+              <a:rPr lang="zh-CN" altLang="en-US" sz="4800" dirty="0">
+                <a:latin typeface="华文楷体" panose="02010600040101010101" pitchFamily="2" charset="-122"/>
+                <a:ea typeface="华文楷体" panose="02010600040101010101" pitchFamily="2" charset="-122"/>
+              </a:rPr>
+              <a:t>结尾</a:t>
+            </a:r>
+          </a:p>
+        </p:txBody>
+      </p:sp>
+      <p:sp>
+        <p:nvSpPr>
+          <p:cNvPr id="3" name="文本框 2">
+            <a:extLst>
+              <a:ext uri="{FF2B5EF4-FFF2-40B4-BE49-F238E27FC236}">
+                <a16:creationId xmlns:a16="http://schemas.microsoft.com/office/drawing/2014/main" id="{01FA6327-2ED9-129D-9265-C58E55E387DC}"/>
+              </a:ext>
+            </a:extLst>
+          </p:cNvPr>
+          <p:cNvSpPr txBox="1"/>
+          <p:nvPr/>
+        </p:nvSpPr>
+        <p:spPr>
+          <a:xfrm>
+            <a:off x="1143000" y="1819274"/>
+            <a:ext cx="9277350" cy="2554545"/>
+          </a:xfrm>
+          <a:prstGeom prst="rect">
+            <a:avLst/>
+          </a:prstGeom>
+          <a:noFill/>
+        </p:spPr>
+        <p:txBody>
+          <a:bodyPr wrap="square" rtlCol="0">
+            <a:spAutoFit/>
+          </a:bodyPr>
+          <a:lstStyle/>
+          <a:p>
+            <a:r>
+              <a:rPr lang="zh-CN" altLang="zh-CN" sz="4000" dirty="0">
+                <a:latin typeface="华文楷体" panose="02010600040101010101" pitchFamily="2" charset="-122"/>
+                <a:ea typeface="华文楷体" panose="02010600040101010101" pitchFamily="2" charset="-122"/>
+              </a:rPr>
+              <a:t>中国文明博大精深，从甲骨文到现在我们用的楷书，背后都是智慧和文化，我们也要努力学好汉字，把中华文化发扬光大！</a:t>
+            </a:r>
+          </a:p>
+        </p:txBody>
+      </p:sp>
+    </p:spTree>
+    <p:extLst>
+      <p:ext uri="{BB962C8B-B14F-4D97-AF65-F5344CB8AC3E}">
+        <p14:creationId xmlns:p14="http://schemas.microsoft.com/office/powerpoint/2010/main" val="1859386732"/>
+      </p:ext>
+    </p:extLst>
+  </p:cSld>
+  <p:clrMapOvr>
+    <a:masterClrMapping/>
+  </p:clrMapOvr>
+  <mc:AlternateContent xmlns:mc="http://schemas.openxmlformats.org/markup-compatibility/2006">
+    <mc:Choice xmlns:p159="http://schemas.microsoft.com/office/powerpoint/2015/09/main" Requires="p159">
+      <p:transition xmlns:p14="http://schemas.microsoft.com/office/powerpoint/2010/main" spd="slow" p14:dur="1250">
+        <p159:morph option="byObject"/>
+      </p:transition>
+    </mc:Choice>
+    <mc:Fallback>
+      <p:transition spd="slow">
+        <p:fade/>
+      </p:transition>
+    </mc:Fallback>
+  </mc:AlternateContent>
+</p:sld>
+</file>
+
+<file path=ppt/slides/slide23.xml><?xml version="1.0" encoding="utf-8"?>
+<p:sld xmlns:a="http://schemas.openxmlformats.org/drawingml/2006/main" xmlns:r="http://schemas.openxmlformats.org/officeDocument/2006/relationships" xmlns:p="http://schemas.openxmlformats.org/presentationml/2006/main">
+  <p:cSld>
+    <p:spTree>
+      <p:nvGrpSpPr>
+        <p:cNvPr id="1" name=""/>
+        <p:cNvGrpSpPr/>
+        <p:nvPr/>
+      </p:nvGrpSpPr>
+      <p:grpSpPr>
+        <a:xfrm>
+          <a:off x="0" y="0"/>
+          <a:ext cx="0" cy="0"/>
+          <a:chOff x="0" y="0"/>
+          <a:chExt cx="0" cy="0"/>
+        </a:xfrm>
+      </p:grpSpPr>
+      <p:sp>
+        <p:nvSpPr>
+          <p:cNvPr id="2" name="标题 1">
+            <a:extLst>
+              <a:ext uri="{FF2B5EF4-FFF2-40B4-BE49-F238E27FC236}">
+                <a16:creationId xmlns:a16="http://schemas.microsoft.com/office/drawing/2014/main" id="{8F46A6FE-B301-BD23-EC37-EF441538E981}"/>
+              </a:ext>
+            </a:extLst>
+          </p:cNvPr>
+          <p:cNvSpPr>
+            <a:spLocks noGrp="1"/>
+          </p:cNvSpPr>
+          <p:nvPr>
+            <p:ph type="title"/>
+          </p:nvPr>
+        </p:nvSpPr>
+        <p:spPr/>
+        <p:txBody>
+          <a:bodyPr>
+            <a:noAutofit/>
+          </a:bodyPr>
+          <a:lstStyle/>
+          <a:p>
+            <a:r>
+              <a:rPr lang="zh-CN" altLang="en-US" sz="12500" dirty="0">
+                <a:latin typeface="楷体" panose="02010609060101010101" pitchFamily="49" charset="-122"/>
+                <a:ea typeface="楷体" panose="02010609060101010101" pitchFamily="49" charset="-122"/>
+              </a:rPr>
+              <a:t>谢谢大家</a:t>
+            </a:r>
+          </a:p>
+        </p:txBody>
+      </p:sp>
+      <p:sp>
+        <p:nvSpPr>
+          <p:cNvPr id="3" name="文本占位符 2">
+            <a:extLst>
+              <a:ext uri="{FF2B5EF4-FFF2-40B4-BE49-F238E27FC236}">
+                <a16:creationId xmlns:a16="http://schemas.microsoft.com/office/drawing/2014/main" id="{D1E3E886-5CFE-3F5D-4FFC-DA28660FA886}"/>
+              </a:ext>
+            </a:extLst>
+          </p:cNvPr>
+          <p:cNvSpPr>
+            <a:spLocks noGrp="1"/>
+          </p:cNvSpPr>
+          <p:nvPr>
+            <p:ph type="body" sz="quarter" idx="13"/>
+          </p:nvPr>
+        </p:nvSpPr>
+        <p:spPr>
+          <a:xfrm>
+            <a:off x="0" y="4708754"/>
+            <a:ext cx="834119" cy="234722"/>
+          </a:xfrm>
+        </p:spPr>
+        <p:txBody>
+          <a:bodyPr>
+            <a:normAutofit fontScale="92500"/>
+          </a:bodyPr>
+          <a:lstStyle/>
+          <a:p>
+            <a:r>
+              <a:rPr lang="zh-CN" altLang="en-US" sz="1000" dirty="0"/>
+              <a:t>非</a:t>
+            </a:r>
+            <a:r>
+              <a:rPr lang="en-US" altLang="zh-CN" sz="1000" dirty="0"/>
+              <a:t>AIGC</a:t>
+            </a:r>
+            <a:r>
+              <a:rPr lang="zh-CN" altLang="en-US" sz="1000" dirty="0"/>
+              <a:t>制作</a:t>
+            </a:r>
+          </a:p>
+        </p:txBody>
+      </p:sp>
+      <p:sp>
+        <p:nvSpPr>
+          <p:cNvPr id="6" name="文本框 5">
+            <a:extLst>
+              <a:ext uri="{FF2B5EF4-FFF2-40B4-BE49-F238E27FC236}">
+                <a16:creationId xmlns:a16="http://schemas.microsoft.com/office/drawing/2014/main" id="{6D01B9B6-EBBF-F414-5BC9-A252EED63053}"/>
+              </a:ext>
+            </a:extLst>
+          </p:cNvPr>
+          <p:cNvSpPr txBox="1"/>
+          <p:nvPr/>
+        </p:nvSpPr>
+        <p:spPr>
+          <a:xfrm>
+            <a:off x="-85043" y="4432939"/>
+            <a:ext cx="1838324" cy="276999"/>
+          </a:xfrm>
+          <a:prstGeom prst="rect">
+            <a:avLst/>
+          </a:prstGeom>
+          <a:noFill/>
+        </p:spPr>
+        <p:txBody>
+          <a:bodyPr wrap="square" rtlCol="0">
+            <a:spAutoFit/>
+          </a:bodyPr>
+          <a:lstStyle/>
+          <a:p>
+            <a:r>
+              <a:rPr lang="en-US" altLang="zh-CN" sz="1200" b="1" dirty="0">
+                <a:latin typeface="华文楷体" panose="02010600040101010101" pitchFamily="2" charset="-122"/>
+                <a:ea typeface="华文楷体" panose="02010600040101010101" pitchFamily="2" charset="-122"/>
+                <a:hlinkClick r:id="rId2"/>
+              </a:rPr>
+              <a:t>©</a:t>
+            </a:r>
+            <a:r>
+              <a:rPr lang="en-US" altLang="zh-CN" sz="1200" dirty="0" err="1">
+                <a:latin typeface="华文楷体" panose="02010600040101010101" pitchFamily="2" charset="-122"/>
+                <a:ea typeface="华文楷体" panose="02010600040101010101" pitchFamily="2" charset="-122"/>
+                <a:hlinkClick r:id="rId2"/>
+              </a:rPr>
+              <a:t>CopyRight</a:t>
+            </a:r>
+            <a:r>
+              <a:rPr lang="en-US" altLang="zh-CN" sz="1200" dirty="0">
+                <a:latin typeface="华文楷体" panose="02010600040101010101" pitchFamily="2" charset="-122"/>
+                <a:ea typeface="华文楷体" panose="02010600040101010101" pitchFamily="2" charset="-122"/>
+                <a:hlinkClick r:id="rId2"/>
+              </a:rPr>
+              <a:t> 2026 </a:t>
+            </a:r>
+            <a:r>
+              <a:rPr lang="zh-CN" altLang="en-US" sz="1200" dirty="0">
+                <a:latin typeface="华文楷体" panose="02010600040101010101" pitchFamily="2" charset="-122"/>
+                <a:ea typeface="华文楷体" panose="02010600040101010101" pitchFamily="2" charset="-122"/>
+                <a:hlinkClick r:id="rId2"/>
+              </a:rPr>
+              <a:t>缪江铭</a:t>
+            </a:r>
+            <a:endParaRPr lang="zh-CN" altLang="en-US" sz="1200" dirty="0">
+              <a:latin typeface="华文楷体" panose="02010600040101010101" pitchFamily="2" charset="-122"/>
+              <a:ea typeface="华文楷体" panose="02010600040101010101" pitchFamily="2" charset="-122"/>
+            </a:endParaRPr>
+          </a:p>
+        </p:txBody>
+      </p:sp>
+      <p:sp>
+        <p:nvSpPr>
+          <p:cNvPr id="8" name="文本框 7">
+            <a:extLst>
+              <a:ext uri="{FF2B5EF4-FFF2-40B4-BE49-F238E27FC236}">
+                <a16:creationId xmlns:a16="http://schemas.microsoft.com/office/drawing/2014/main" id="{07B1843A-A225-8F5D-FF9E-CF517B5D4277}"/>
+              </a:ext>
+            </a:extLst>
+          </p:cNvPr>
+          <p:cNvSpPr txBox="1"/>
+          <p:nvPr/>
+        </p:nvSpPr>
+        <p:spPr>
+          <a:xfrm>
+            <a:off x="-85043" y="4340015"/>
+            <a:ext cx="2041579" cy="230832"/>
+          </a:xfrm>
+          <a:prstGeom prst="rect">
+            <a:avLst/>
+          </a:prstGeom>
+          <a:noFill/>
+        </p:spPr>
+        <p:txBody>
+          <a:bodyPr wrap="square" rtlCol="0">
+            <a:spAutoFit/>
+          </a:bodyPr>
+          <a:lstStyle/>
+          <a:p>
+            <a:r>
+              <a:rPr lang="en-US" altLang="zh-CN" sz="900" dirty="0">
+                <a:hlinkClick r:id="rId2"/>
+              </a:rPr>
+              <a:t>https://github.com/JiangmingLater/-1</a:t>
+            </a:r>
+            <a:endParaRPr lang="zh-CN" altLang="en-US" sz="900" dirty="0"/>
+          </a:p>
+        </p:txBody>
+      </p:sp>
+    </p:spTree>
+    <p:extLst>
+      <p:ext uri="{BB962C8B-B14F-4D97-AF65-F5344CB8AC3E}">
+        <p14:creationId xmlns:p14="http://schemas.microsoft.com/office/powerpoint/2010/main" val="2755718051"/>
+      </p:ext>
+    </p:extLst>
+  </p:cSld>
+  <p:clrMapOvr>
+    <a:masterClrMapping/>
+  </p:clrMapOvr>
+  <mc:AlternateContent xmlns:mc="http://schemas.openxmlformats.org/markup-compatibility/2006">
+    <mc:Choice xmlns:p159="http://schemas.microsoft.com/office/powerpoint/2015/09/main" Requires="p159">
+      <p:transition xmlns:p14="http://schemas.microsoft.com/office/powerpoint/2010/main" spd="slow" p14:dur="1250">
+        <p159:morph option="byObject"/>
+      </p:transition>
+    </mc:Choice>
+    <mc:Fallback>
+      <p:transition spd="slow">
+        <p:fade/>
+      </p:transition>
+    </mc:Fallback>
+  </mc:AlternateContent>
 </p:sld>
 </file>
 
@@ -6527,6 +7790,18 @@
   <p:clrMapOvr>
     <a:masterClrMapping/>
   </p:clrMapOvr>
+  <mc:AlternateContent xmlns:mc="http://schemas.openxmlformats.org/markup-compatibility/2006">
+    <mc:Choice xmlns:p159="http://schemas.microsoft.com/office/powerpoint/2015/09/main" Requires="p159">
+      <p:transition xmlns:p14="http://schemas.microsoft.com/office/powerpoint/2010/main" spd="slow" p14:dur="1250">
+        <p159:morph option="byObject"/>
+      </p:transition>
+    </mc:Choice>
+    <mc:Fallback>
+      <p:transition spd="slow">
+        <p:fade/>
+      </p:transition>
+    </mc:Fallback>
+  </mc:AlternateContent>
 </p:sld>
 </file>
 
@@ -6803,6 +8078,18 @@
   <p:clrMapOvr>
     <a:masterClrMapping/>
   </p:clrMapOvr>
+  <mc:AlternateContent xmlns:mc="http://schemas.openxmlformats.org/markup-compatibility/2006">
+    <mc:Choice xmlns:p159="http://schemas.microsoft.com/office/powerpoint/2015/09/main" Requires="p159">
+      <p:transition xmlns:p14="http://schemas.microsoft.com/office/powerpoint/2010/main" spd="slow" p14:dur="1250">
+        <p159:morph option="byObject"/>
+      </p:transition>
+    </mc:Choice>
+    <mc:Fallback>
+      <p:transition spd="slow">
+        <p:fade/>
+      </p:transition>
+    </mc:Fallback>
+  </mc:AlternateContent>
 </p:sld>
 </file>
 
@@ -6897,6 +8184,18 @@
   <p:clrMapOvr>
     <a:masterClrMapping/>
   </p:clrMapOvr>
+  <mc:AlternateContent xmlns:mc="http://schemas.openxmlformats.org/markup-compatibility/2006">
+    <mc:Choice xmlns:p159="http://schemas.microsoft.com/office/powerpoint/2015/09/main" Requires="p159">
+      <p:transition xmlns:p14="http://schemas.microsoft.com/office/powerpoint/2010/main" spd="slow" p14:dur="1250">
+        <p159:morph option="byObject"/>
+      </p:transition>
+    </mc:Choice>
+    <mc:Fallback>
+      <p:transition spd="slow">
+        <p:fade/>
+      </p:transition>
+    </mc:Fallback>
+  </mc:AlternateContent>
 </p:sld>
 </file>
 
@@ -7134,6 +8433,18 @@
   <p:clrMapOvr>
     <a:masterClrMapping/>
   </p:clrMapOvr>
+  <mc:AlternateContent xmlns:mc="http://schemas.openxmlformats.org/markup-compatibility/2006">
+    <mc:Choice xmlns:p159="http://schemas.microsoft.com/office/powerpoint/2015/09/main" Requires="p159">
+      <p:transition xmlns:p14="http://schemas.microsoft.com/office/powerpoint/2010/main" spd="slow" p14:dur="1250">
+        <p159:morph option="byObject"/>
+      </p:transition>
+    </mc:Choice>
+    <mc:Fallback>
+      <p:transition spd="slow">
+        <p:fade/>
+      </p:transition>
+    </mc:Fallback>
+  </mc:AlternateContent>
 </p:sld>
 </file>
 
@@ -7216,6 +8527,18 @@
   <p:clrMapOvr>
     <a:masterClrMapping/>
   </p:clrMapOvr>
+  <mc:AlternateContent xmlns:mc="http://schemas.openxmlformats.org/markup-compatibility/2006">
+    <mc:Choice xmlns:p159="http://schemas.microsoft.com/office/powerpoint/2015/09/main" Requires="p159">
+      <p:transition xmlns:p14="http://schemas.microsoft.com/office/powerpoint/2010/main" spd="slow" p14:dur="1250">
+        <p159:morph option="byObject"/>
+      </p:transition>
+    </mc:Choice>
+    <mc:Fallback>
+      <p:transition spd="slow">
+        <p:fade/>
+      </p:transition>
+    </mc:Fallback>
+  </mc:AlternateContent>
 </p:sld>
 </file>
 
@@ -7556,6 +8879,18 @@
   <p:clrMapOvr>
     <a:masterClrMapping/>
   </p:clrMapOvr>
+  <mc:AlternateContent xmlns:mc="http://schemas.openxmlformats.org/markup-compatibility/2006">
+    <mc:Choice xmlns:p159="http://schemas.microsoft.com/office/powerpoint/2015/09/main" Requires="p159">
+      <p:transition xmlns:p14="http://schemas.microsoft.com/office/powerpoint/2010/main" spd="slow" p14:dur="1250">
+        <p159:morph option="byObject"/>
+      </p:transition>
+    </mc:Choice>
+    <mc:Fallback>
+      <p:transition spd="slow">
+        <p:fade/>
+      </p:transition>
+    </mc:Fallback>
+  </mc:AlternateContent>
 </p:sld>
 </file>
 
@@ -7650,6 +8985,18 @@
   <p:clrMapOvr>
     <a:masterClrMapping/>
   </p:clrMapOvr>
+  <mc:AlternateContent xmlns:mc="http://schemas.openxmlformats.org/markup-compatibility/2006">
+    <mc:Choice xmlns:p159="http://schemas.microsoft.com/office/powerpoint/2015/09/main" Requires="p159">
+      <p:transition xmlns:p14="http://schemas.microsoft.com/office/powerpoint/2010/main" spd="slow" p14:dur="1250">
+        <p159:morph option="byObject"/>
+      </p:transition>
+    </mc:Choice>
+    <mc:Fallback>
+      <p:transition spd="slow">
+        <p:fade/>
+      </p:transition>
+    </mc:Fallback>
+  </mc:AlternateContent>
 </p:sld>
 </file>
 
